--- a/weeks/2026-10-19/decks/Sabio_MNA_VYVGART_EPSOLAY_CTV_Short_10.19.26.pptx
+++ b/weeks/2026-10-19/decks/Sabio_MNA_VYVGART_EPSOLAY_CTV_Short_10.19.26.pptx
@@ -1667,6 +1667,220 @@
 </p:sldLayout>
 </file>
 
+<file path=ppt/slideLayouts/slideLayout2.xml><?xml version="1.0" encoding="utf-8"?>
+<p:sldLayout xmlns:a="http://schemas.openxmlformats.org/drawingml/2006/main" xmlns:r="http://schemas.openxmlformats.org/officeDocument/2006/relationships" xmlns:p="http://schemas.openxmlformats.org/presentationml/2006/main" preserve="1">
+  <p:cSld name="SABIO_CONTENT">
+    <p:bg>
+      <p:bgPr>
+        <a:solidFill>
+          <a:srgbClr val="1A1A1A"/>
+        </a:solidFill>
+      </p:bgPr>
+    </p:bg>
+    <p:spTree>
+      <p:nvGrpSpPr>
+        <p:cNvPr id="1" name=""/>
+        <p:cNvGrpSpPr/>
+        <p:nvPr/>
+      </p:nvGrpSpPr>
+      <p:grpSpPr>
+        <a:xfrm>
+          <a:off x="0" y="0"/>
+          <a:ext cx="0" cy="0"/>
+          <a:chOff x="0" y="0"/>
+          <a:chExt cx="0" cy="0"/>
+        </a:xfrm>
+      </p:grpSpPr>
+      <p:pic>
+        <p:nvPicPr>
+          <p:cNvPr id="2" name="Image 0" descr="/home/claude/sabio-deck-builders-/assets/sabio-logo-white-sm.png">    </p:cNvPr>
+          <p:cNvPicPr>
+            <a:picLocks noChangeAspect="1"/>
+          </p:cNvPicPr>
+          <p:nvPr/>
+        </p:nvPicPr>
+        <p:blipFill>
+          <a:blip r:embed="rId1"/>
+          <a:stretch>
+            <a:fillRect/>
+          </a:stretch>
+        </p:blipFill>
+        <p:spPr>
+          <a:xfrm>
+            <a:off x="8028432" y="4805172"/>
+            <a:ext cx="647572" cy="155448"/>
+          </a:xfrm>
+          <a:prstGeom prst="rect">
+            <a:avLst/>
+          </a:prstGeom>
+        </p:spPr>
+      </p:pic>
+      <p:sp>
+        <p:nvSpPr>
+          <p:cNvPr id="3" name="Text 0"/>
+          <p:cNvSpPr/>
+          <p:nvPr/>
+        </p:nvSpPr>
+        <p:spPr>
+          <a:xfrm>
+            <a:off x="868680" y="4832604"/>
+            <a:ext cx="5486400" cy="182880"/>
+          </a:xfrm>
+          <a:prstGeom prst="rect">
+            <a:avLst/>
+          </a:prstGeom>
+          <a:noFill/>
+          <a:ln/>
+        </p:spPr>
+        <p:txBody>
+          <a:bodyPr wrap="square" lIns="0" tIns="0" rIns="0" bIns="0" rtlCol="0" anchor="t"/>
+          <a:lstStyle/>
+          <a:p>
+            <a:pPr indent="0" marL="0">
+              <a:buNone/>
+            </a:pPr>
+            <a:r>
+              <a:rPr lang="en-US" sz="700" dirty="0">
+                <a:solidFill>
+                  <a:srgbClr val="7E7E7E"/>
+                </a:solidFill>
+                <a:latin typeface="Poppins" pitchFamily="34" charset="0"/>
+                <a:ea typeface="Poppins" pitchFamily="34" charset="-122"/>
+                <a:cs typeface="Poppins" pitchFamily="34" charset="-120"/>
+              </a:rPr>
+              <a:t>Sabio × minds + assembly  ·  VYVGART and EPSOLAY, the short version  ·  Confidential</a:t>
+            </a:r>
+            <a:endParaRPr lang="en-US" sz="700" dirty="0"/>
+          </a:p>
+        </p:txBody>
+      </p:sp>
+      <p:sp>
+        <p:nvSpPr>
+          <p:cNvPr id="25" name="Slide Number Placeholder 0"/>
+          <p:cNvSpPr>
+            <a:spLocks noGrp="1"/>
+          </p:cNvSpPr>
+          <p:nvPr>
+            <p:ph type="sldNum" sz="quarter" idx="4294967295"/>
+          </p:nvPr>
+        </p:nvSpPr>
+        <p:spPr>
+          <a:xfrm>
+            <a:off x="457200" y="4832604"/>
+            <a:ext cx="365760" cy="182880"/>
+          </a:xfrm>
+          <a:prstGeom prst="rect">
+            <a:avLst/>
+          </a:prstGeom>
+          <a:extLst>
+            <a:ext uri="{C572A759-6A51-4108-AA02-DFA0A04FC94B}">
+              <ma14:wrappingTextBoxFlag xmlns:ma14="http://schemas.microsoft.com/office/mac/drawingml/2011/main" val="0"/>
+            </a:ext>
+          </a:extLst>
+        </p:spPr>
+        <p:txBody>
+          <a:bodyPr lIns="0" tIns="0" rIns="0" bIns="0"/>
+          <a:lstStyle>
+            <a:lvl1pPr>
+              <a:defRPr sz="800">
+                <a:solidFill>
+                  <a:srgbClr val="7E7E7E"/>
+                </a:solidFill>
+                <a:latin typeface="Poppins SemiBold"/>
+                <a:ea typeface="Poppins SemiBold"/>
+                <a:cs typeface="Poppins SemiBold"/>
+              </a:defRPr>
+            </a:lvl1pPr>
+          </a:lstStyle>
+          <a:p>
+            <a:pPr algn="l"/>
+            <a:fld id="{F7021451-1387-4CA6-816F-3879F97B5CBC}" type="slidenum">
+              <a:rPr b="0" lang="en-US"/>
+              <a:t>1002</a:t>
+            </a:fld>
+            <a:endParaRPr lang="en-US"/>
+          </a:p>
+        </p:txBody>
+      </p:sp>
+    </p:spTree>
+  </p:cSld>
+  <p:clrMapOvr>
+    <a:masterClrMapping/>
+  </p:clrMapOvr>
+</p:sldLayout>
+</file>
+
+<file path=ppt/slideLayouts/slideLayout3.xml><?xml version="1.0" encoding="utf-8"?>
+<p:sldLayout xmlns:a="http://schemas.openxmlformats.org/drawingml/2006/main" xmlns:r="http://schemas.openxmlformats.org/officeDocument/2006/relationships" xmlns:p="http://schemas.openxmlformats.org/presentationml/2006/main" preserve="1">
+  <p:cSld name="SABIO_COVER">
+    <p:bg>
+      <p:bgPr>
+        <a:solidFill>
+          <a:srgbClr val="1A1A1A"/>
+        </a:solidFill>
+      </p:bgPr>
+    </p:bg>
+    <p:spTree>
+      <p:nvGrpSpPr>
+        <p:cNvPr id="1" name=""/>
+        <p:cNvGrpSpPr/>
+        <p:nvPr/>
+      </p:nvGrpSpPr>
+      <p:grpSpPr>
+        <a:xfrm>
+          <a:off x="0" y="0"/>
+          <a:ext cx="0" cy="0"/>
+          <a:chOff x="0" y="0"/>
+          <a:chExt cx="0" cy="0"/>
+        </a:xfrm>
+      </p:grpSpPr>
+      <p:sp>
+        <p:nvSpPr>
+          <p:cNvPr id="2" name="Text 0"/>
+          <p:cNvSpPr/>
+          <p:nvPr/>
+        </p:nvSpPr>
+        <p:spPr>
+          <a:xfrm>
+            <a:off x="457200" y="4832604"/>
+            <a:ext cx="5852160" cy="182880"/>
+          </a:xfrm>
+          <a:prstGeom prst="rect">
+            <a:avLst/>
+          </a:prstGeom>
+          <a:noFill/>
+          <a:ln/>
+        </p:spPr>
+        <p:txBody>
+          <a:bodyPr wrap="square" lIns="0" tIns="0" rIns="0" bIns="0" rtlCol="0" anchor="t"/>
+          <a:lstStyle/>
+          <a:p>
+            <a:pPr indent="0" marL="0">
+              <a:buNone/>
+            </a:pPr>
+            <a:r>
+              <a:rPr lang="en-US" sz="700" dirty="0">
+                <a:solidFill>
+                  <a:srgbClr val="7E7E7E"/>
+                </a:solidFill>
+                <a:latin typeface="Poppins" pitchFamily="34" charset="0"/>
+                <a:ea typeface="Poppins" pitchFamily="34" charset="-122"/>
+                <a:cs typeface="Poppins" pitchFamily="34" charset="-120"/>
+              </a:rPr>
+              <a:t>Sabio Holdings · TSXV: SBIO | OTCQB: SABOF    Creator TV® | App Science® | Sabio</a:t>
+            </a:r>
+            <a:endParaRPr lang="en-US" sz="700" dirty="0"/>
+          </a:p>
+        </p:txBody>
+      </p:sp>
+    </p:spTree>
+  </p:cSld>
+  <p:clrMapOvr>
+    <a:masterClrMapping/>
+  </p:clrMapOvr>
+</p:sldLayout>
+</file>
+
 <file path=ppt/slideMasters/slideMaster1.xml><?xml version="1.0" encoding="utf-8"?>
 <p:sldMaster xmlns:a="http://schemas.openxmlformats.org/drawingml/2006/main" xmlns:r="http://schemas.openxmlformats.org/officeDocument/2006/relationships" xmlns:p="http://schemas.openxmlformats.org/presentationml/2006/main">
   <p:cSld>
@@ -1684,11 +1898,61 @@
           <a:chExt cx="0" cy="0"/>
         </a:xfrm>
       </p:grpSpPr>
+      <p:sp>
+        <p:nvSpPr>
+          <p:cNvPr id="25" name="Slide Number Placeholder 0"/>
+          <p:cNvSpPr>
+            <a:spLocks noGrp="1"/>
+          </p:cNvSpPr>
+          <p:nvPr>
+            <p:ph type="sldNum" sz="quarter" idx="4294967295"/>
+          </p:nvPr>
+        </p:nvSpPr>
+        <p:spPr>
+          <a:xfrm>
+            <a:off x="457200" y="4832604"/>
+            <a:ext cx="365760" cy="182880"/>
+          </a:xfrm>
+          <a:prstGeom prst="rect">
+            <a:avLst/>
+          </a:prstGeom>
+          <a:extLst>
+            <a:ext uri="{C572A759-6A51-4108-AA02-DFA0A04FC94B}">
+              <ma14:wrappingTextBoxFlag xmlns:ma14="http://schemas.microsoft.com/office/mac/drawingml/2011/main" val="0"/>
+            </a:ext>
+          </a:extLst>
+        </p:spPr>
+        <p:txBody>
+          <a:bodyPr lIns="0" tIns="0" rIns="0" bIns="0"/>
+          <a:lstStyle>
+            <a:lvl1pPr>
+              <a:defRPr sz="800">
+                <a:solidFill>
+                  <a:srgbClr val="7E7E7E"/>
+                </a:solidFill>
+                <a:latin typeface="Poppins SemiBold"/>
+                <a:ea typeface="Poppins SemiBold"/>
+                <a:cs typeface="Poppins SemiBold"/>
+              </a:defRPr>
+            </a:lvl1pPr>
+          </a:lstStyle>
+          <a:p>
+            <a:pPr algn="l"/>
+            <a:fld id="{F7021451-1387-4CA6-816F-3879F97B5CBC}" type="slidenum">
+              <a:rPr b="0" lang="en-US"/>
+              <a:t>null</a:t>
+            </a:fld>
+            <a:endParaRPr lang="en-US"/>
+          </a:p>
+        </p:txBody>
+      </p:sp>
     </p:spTree>
   </p:cSld>
   <p:clrMap bg1="lt1" tx1="dk1" bg2="lt2" tx2="dk2" accent1="accent1" accent2="accent2" accent3="accent3" accent4="accent4" accent5="accent5" accent6="accent6" hlink="hlink" folHlink="folHlink"/>
   <p:sldLayoutIdLst>
     <p:sldLayoutId id="2147483649" r:id="rId1"/>
+    <p:sldLayoutId id="2147483650" r:id="rId2"/>
+    <p:sldLayoutId id="2147483651" r:id="rId3"/>
   </p:sldLayoutIdLst>
   <p:hf sldNum="0" hdr="0" ftr="0" dt="0"/>
   <p:txStyles>
@@ -1947,13 +2211,6 @@
 <file path=ppt/slides/slide1.xml><?xml version="1.0" encoding="utf-8"?>
 <p:sld xmlns:a="http://schemas.openxmlformats.org/drawingml/2006/main" xmlns:r="http://schemas.openxmlformats.org/officeDocument/2006/relationships" xmlns:p="http://schemas.openxmlformats.org/presentationml/2006/main">
   <p:cSld name="Slide 1">
-    <p:bg>
-      <p:bgPr>
-        <a:solidFill>
-          <a:srgbClr val="1A1A1A"/>
-        </a:solidFill>
-      </p:bgPr>
-    </p:bg>
     <p:spTree>
       <p:nvGrpSpPr>
         <p:cNvPr id="1" name=""/>
@@ -1970,7 +2227,7 @@
       </p:grpSpPr>
       <p:pic>
         <p:nvPicPr>
-          <p:cNvPr id="2" name="Image 0" descr="/home/claude/benjaminbring-cloud/sabio-deck-builders-/assets/sabio-logo-yellow.png">    </p:cNvPr>
+          <p:cNvPr id="2" name="Image 0" descr="/home/claude/sabio-deck-builders-/assets/sabio-logo-yellow.png">    </p:cNvPr>
           <p:cNvPicPr>
             <a:picLocks noChangeAspect="1"/>
           </p:cNvPicPr>
@@ -2385,45 +2642,6 @@
               <a:t>Up from 32% in Q1. Rx TV budgets are moving to streaming this year, and the audiences can move with them. [2]</a:t>
             </a:r>
             <a:endParaRPr lang="en-US" sz="900" dirty="0"/>
-          </a:p>
-        </p:txBody>
-      </p:sp>
-      <p:sp>
-        <p:nvSpPr>
-          <p:cNvPr id="13" name="Text 10"/>
-          <p:cNvSpPr txBox="1"/>
-          <p:nvPr/>
-        </p:nvSpPr>
-        <p:spPr>
-          <a:xfrm>
-            <a:off x="457200" y="4832604"/>
-            <a:ext cx="5852160" cy="182880"/>
-          </a:xfrm>
-          <a:prstGeom prst="rect">
-            <a:avLst/>
-          </a:prstGeom>
-          <a:noFill/>
-          <a:ln/>
-        </p:spPr>
-        <p:txBody>
-          <a:bodyPr wrap="square" lIns="0" tIns="0" rIns="0" bIns="0" rtlCol="0" anchor="t"/>
-          <a:lstStyle/>
-          <a:p>
-            <a:pPr indent="0" marL="0">
-              <a:buNone/>
-            </a:pPr>
-            <a:r>
-              <a:rPr lang="en-US" sz="700" dirty="0">
-                <a:solidFill>
-                  <a:srgbClr val="7E7E7E"/>
-                </a:solidFill>
-                <a:latin typeface="Poppins" pitchFamily="34" charset="0"/>
-                <a:ea typeface="Poppins" pitchFamily="34" charset="-122"/>
-                <a:cs typeface="Poppins" pitchFamily="34" charset="-120"/>
-              </a:rPr>
-              <a:t>Sabio Holdings · TSXV: SBIO | OTCQB: SABOF    Creator TV® | App Science® | Sabio</a:t>
-            </a:r>
-            <a:endParaRPr lang="en-US" sz="700" dirty="0"/>
           </a:p>
         </p:txBody>
       </p:sp>
@@ -2438,13 +2656,6 @@
 <file path=ppt/slides/slide10.xml><?xml version="1.0" encoding="utf-8"?>
 <p:sld xmlns:a="http://schemas.openxmlformats.org/drawingml/2006/main" xmlns:r="http://schemas.openxmlformats.org/officeDocument/2006/relationships" xmlns:p="http://schemas.openxmlformats.org/presentationml/2006/main">
   <p:cSld name="Slide 10">
-    <p:bg>
-      <p:bgPr>
-        <a:solidFill>
-          <a:srgbClr val="1A1A1A"/>
-        </a:solidFill>
-      </p:bgPr>
-    </p:bg>
     <p:spTree>
       <p:nvGrpSpPr>
         <p:cNvPr id="1" name=""/>
@@ -2545,120 +2756,38 @@
         </p:nvSpPr>
         <p:spPr>
           <a:xfrm>
-            <a:off x="457200" y="4832604"/>
-            <a:ext cx="365760" cy="182880"/>
-          </a:xfrm>
-          <a:prstGeom prst="rect">
-            <a:avLst/>
-          </a:prstGeom>
-          <a:noFill/>
-          <a:ln/>
-        </p:spPr>
-        <p:txBody>
-          <a:bodyPr wrap="square" lIns="0" tIns="0" rIns="0" bIns="0" rtlCol="0" anchor="t"/>
-          <a:lstStyle/>
-          <a:p>
-            <a:pPr indent="0" marL="0">
-              <a:buNone/>
-            </a:pPr>
-            <a:r>
-              <a:rPr lang="en-US" sz="800" dirty="0">
-                <a:solidFill>
-                  <a:srgbClr val="7E7E7E"/>
-                </a:solidFill>
-                <a:latin typeface="Poppins SemiBold" pitchFamily="34" charset="0"/>
-                <a:ea typeface="Poppins SemiBold" pitchFamily="34" charset="-122"/>
-                <a:cs typeface="Poppins SemiBold" pitchFamily="34" charset="-120"/>
-              </a:rPr>
-              <a:t>10</a:t>
-            </a:r>
-            <a:endParaRPr lang="en-US" sz="800" dirty="0"/>
-          </a:p>
-        </p:txBody>
-      </p:sp>
-      <p:sp>
-        <p:nvSpPr>
-          <p:cNvPr id="5" name="Text 3"/>
-          <p:cNvSpPr txBox="1"/>
-          <p:nvPr/>
-        </p:nvSpPr>
-        <p:spPr>
-          <a:xfrm>
-            <a:off x="868680" y="4832604"/>
-            <a:ext cx="5486400" cy="182880"/>
-          </a:xfrm>
-          <a:prstGeom prst="rect">
-            <a:avLst/>
-          </a:prstGeom>
-          <a:noFill/>
-          <a:ln/>
-        </p:spPr>
-        <p:txBody>
-          <a:bodyPr wrap="square" lIns="0" tIns="0" rIns="0" bIns="0" rtlCol="0" anchor="t"/>
-          <a:lstStyle/>
-          <a:p>
-            <a:pPr indent="0" marL="0">
-              <a:buNone/>
-            </a:pPr>
-            <a:r>
-              <a:rPr lang="en-US" sz="700" dirty="0">
-                <a:solidFill>
-                  <a:srgbClr val="7E7E7E"/>
+            <a:off x="457200" y="1188720"/>
+            <a:ext cx="4023360" cy="3200400"/>
+          </a:xfrm>
+          <a:prstGeom prst="rect">
+            <a:avLst/>
+          </a:prstGeom>
+          <a:noFill/>
+          <a:ln/>
+        </p:spPr>
+        <p:txBody>
+          <a:bodyPr wrap="square" lIns="0" tIns="0" rIns="0" bIns="0" rtlCol="0" anchor="t"/>
+          <a:lstStyle/>
+          <a:p>
+            <a:pPr indent="0" marL="0">
+              <a:spcAft>
+                <a:spcPts val="800"/>
+              </a:spcAft>
+              <a:buNone/>
+            </a:pPr>
+            <a:r>
+              <a:rPr lang="en-US" sz="850" dirty="0">
+                <a:solidFill>
+                  <a:srgbClr val="E3E3E3"/>
                 </a:solidFill>
                 <a:latin typeface="Poppins" pitchFamily="34" charset="0"/>
                 <a:ea typeface="Poppins" pitchFamily="34" charset="-122"/>
                 <a:cs typeface="Poppins" pitchFamily="34" charset="-120"/>
               </a:rPr>
-              <a:t>Sabio × minds + assembly  ·  VYVGART and EPSOLAY, the short version  ·  Confidential</a:t>
-            </a:r>
-            <a:endParaRPr lang="en-US" sz="700" dirty="0"/>
-          </a:p>
-        </p:txBody>
-      </p:sp>
-      <p:pic>
-        <p:nvPicPr>
-          <p:cNvPr id="6" name="Image 0" descr="/home/claude/benjaminbring-cloud/sabio-deck-builders-/assets/sabio-logo-white-sm.png">    </p:cNvPr>
-          <p:cNvPicPr>
-            <a:picLocks noChangeAspect="1"/>
-          </p:cNvPicPr>
-          <p:nvPr/>
-        </p:nvPicPr>
-        <p:blipFill>
-          <a:blip r:embed="rId1"/>
-          <a:stretch>
-            <a:fillRect/>
-          </a:stretch>
-        </p:blipFill>
-        <p:spPr>
-          <a:xfrm>
-            <a:off x="8028432" y="4805172"/>
-            <a:ext cx="647572" cy="155448"/>
-          </a:xfrm>
-          <a:prstGeom prst="rect">
-            <a:avLst/>
-          </a:prstGeom>
-        </p:spPr>
-      </p:pic>
-      <p:sp>
-        <p:nvSpPr>
-          <p:cNvPr id="7" name="Text 4"/>
-          <p:cNvSpPr txBox="1"/>
-          <p:nvPr/>
-        </p:nvSpPr>
-        <p:spPr>
-          <a:xfrm>
-            <a:off x="457200" y="1188720"/>
-            <a:ext cx="4023360" cy="3200400"/>
-          </a:xfrm>
-          <a:prstGeom prst="rect">
-            <a:avLst/>
-          </a:prstGeom>
-          <a:noFill/>
-          <a:ln/>
-        </p:spPr>
-        <p:txBody>
-          <a:bodyPr wrap="square" lIns="0" tIns="0" rIns="0" bIns="0" rtlCol="0" anchor="t"/>
-          <a:lstStyle/>
+              <a:t>1.  argenx half year 2026 results and Q2 business update, Jul 23, 2026, via BioSpace.</a:t>
+            </a:r>
+            <a:endParaRPr lang="en-US" sz="850" dirty="0"/>
+          </a:p>
           <a:p>
             <a:pPr indent="0" marL="0">
               <a:spcAft>
@@ -2675,7 +2804,7 @@
                 <a:ea typeface="Poppins" pitchFamily="34" charset="-122"/>
                 <a:cs typeface="Poppins" pitchFamily="34" charset="-120"/>
               </a:rPr>
-              <a:t>1.  argenx half year 2026 results and Q2 business update, Jul 23, 2026, via BioSpace.</a:t>
+              <a:t>2.  EMARKETER, Pharma Rx TV ad spending and streaming share, iSpot.tv data, Oct 9, 2026.</a:t>
             </a:r>
             <a:endParaRPr lang="en-US" sz="850" dirty="0"/>
           </a:p>
@@ -2695,10 +2824,32 @@
                 <a:ea typeface="Poppins" pitchFamily="34" charset="-122"/>
                 <a:cs typeface="Poppins" pitchFamily="34" charset="-120"/>
               </a:rPr>
-              <a:t>2.  EMARKETER, Pharma Rx TV ad spending and streaming share, iSpot.tv data, Oct 9, 2026.</a:t>
+              <a:t>3.  National Rosacea Society; Baylor College of Medicine (as cited in the 10.15 Sabio plan).</a:t>
             </a:r>
             <a:endParaRPr lang="en-US" sz="850" dirty="0"/>
           </a:p>
+        </p:txBody>
+      </p:sp>
+      <p:sp>
+        <p:nvSpPr>
+          <p:cNvPr id="5" name="Text 3"/>
+          <p:cNvSpPr txBox="1"/>
+          <p:nvPr/>
+        </p:nvSpPr>
+        <p:spPr>
+          <a:xfrm>
+            <a:off x="4663440" y="1188720"/>
+            <a:ext cx="4023360" cy="3200400"/>
+          </a:xfrm>
+          <a:prstGeom prst="rect">
+            <a:avLst/>
+          </a:prstGeom>
+          <a:noFill/>
+          <a:ln/>
+        </p:spPr>
+        <p:txBody>
+          <a:bodyPr wrap="square" lIns="0" tIns="0" rIns="0" bIns="0" rtlCol="0" anchor="t"/>
+          <a:lstStyle/>
           <a:p>
             <a:pPr indent="0" marL="0">
               <a:spcAft>
@@ -2715,32 +2866,10 @@
                 <a:ea typeface="Poppins" pitchFamily="34" charset="-122"/>
                 <a:cs typeface="Poppins" pitchFamily="34" charset="-120"/>
               </a:rPr>
-              <a:t>3.  National Rosacea Society; Baylor College of Medicine (as cited in the 10.15 Sabio plan).</a:t>
+              <a:t>4.  DelveInsight, 2025 (US gMG prevalence); GBS|CIDP Foundation International.</a:t>
             </a:r>
             <a:endParaRPr lang="en-US" sz="850" dirty="0"/>
           </a:p>
-        </p:txBody>
-      </p:sp>
-      <p:sp>
-        <p:nvSpPr>
-          <p:cNvPr id="8" name="Text 5"/>
-          <p:cNvSpPr txBox="1"/>
-          <p:nvPr/>
-        </p:nvSpPr>
-        <p:spPr>
-          <a:xfrm>
-            <a:off x="4663440" y="1188720"/>
-            <a:ext cx="4023360" cy="3200400"/>
-          </a:xfrm>
-          <a:prstGeom prst="rect">
-            <a:avLst/>
-          </a:prstGeom>
-          <a:noFill/>
-          <a:ln/>
-        </p:spPr>
-        <p:txBody>
-          <a:bodyPr wrap="square" lIns="0" tIns="0" rIns="0" bIns="0" rtlCol="0" anchor="t"/>
-          <a:lstStyle/>
           <a:p>
             <a:pPr indent="0" marL="0">
               <a:spcAft>
@@ -2757,29 +2886,57 @@
                 <a:ea typeface="Poppins" pitchFamily="34" charset="-122"/>
                 <a:cs typeface="Poppins" pitchFamily="34" charset="-120"/>
               </a:rPr>
-              <a:t>4.  DelveInsight, 2025 (US gMG prevalence); GBS|CIDP Foundation International.</a:t>
+              <a:t>5.  Sabio Q4 2026 Overview (Creator TV distribution); Sabio CTV privacy FAQ, 2026.</a:t>
             </a:r>
             <a:endParaRPr lang="en-US" sz="850" dirty="0"/>
           </a:p>
-          <a:p>
-            <a:pPr indent="0" marL="0">
-              <a:spcAft>
-                <a:spcPts val="800"/>
-              </a:spcAft>
-              <a:buNone/>
-            </a:pPr>
-            <a:r>
-              <a:rPr lang="en-US" sz="850" dirty="0">
-                <a:solidFill>
-                  <a:srgbClr val="E3E3E3"/>
-                </a:solidFill>
-                <a:latin typeface="Poppins" pitchFamily="34" charset="0"/>
-                <a:ea typeface="Poppins" pitchFamily="34" charset="-122"/>
-                <a:cs typeface="Poppins" pitchFamily="34" charset="-120"/>
-              </a:rPr>
-              <a:t>5.  Sabio Q4 2026 Overview (Creator TV distribution); Sabio CTV privacy FAQ, 2026.</a:t>
-            </a:r>
-            <a:endParaRPr lang="en-US" sz="850" dirty="0"/>
+        </p:txBody>
+      </p:sp>
+      <p:sp>
+        <p:nvSpPr>
+          <p:cNvPr id="25" name="Slide Number Placeholder 0"/>
+          <p:cNvSpPr>
+            <a:spLocks noGrp="1"/>
+          </p:cNvSpPr>
+          <p:nvPr>
+            <p:ph type="sldNum" sz="quarter" idx="4294967295"/>
+          </p:nvPr>
+        </p:nvSpPr>
+        <p:spPr>
+          <a:xfrm>
+            <a:off x="457200" y="4832604"/>
+            <a:ext cx="365760" cy="182880"/>
+          </a:xfrm>
+          <a:prstGeom prst="rect">
+            <a:avLst/>
+          </a:prstGeom>
+          <a:extLst>
+            <a:ext uri="{C572A759-6A51-4108-AA02-DFA0A04FC94B}">
+              <ma14:wrappingTextBoxFlag xmlns:ma14="http://schemas.microsoft.com/office/mac/drawingml/2011/main" val="0"/>
+            </a:ext>
+          </a:extLst>
+        </p:spPr>
+        <p:txBody>
+          <a:bodyPr lIns="0" tIns="0" rIns="0" bIns="0"/>
+          <a:lstStyle>
+            <a:lvl1pPr>
+              <a:defRPr sz="800">
+                <a:solidFill>
+                  <a:srgbClr val="7E7E7E"/>
+                </a:solidFill>
+                <a:latin typeface="Poppins SemiBold"/>
+                <a:ea typeface="Poppins SemiBold"/>
+                <a:cs typeface="Poppins SemiBold"/>
+              </a:defRPr>
+            </a:lvl1pPr>
+          </a:lstStyle>
+          <a:p>
+            <a:pPr algn="l"/>
+            <a:fld id="{F7021451-1387-4CA6-816F-3879F97B5CBC}" type="slidenum">
+              <a:rPr b="0" lang="en-US"/>
+              <a:t>10</a:t>
+            </a:fld>
+            <a:endParaRPr lang="en-US"/>
           </a:p>
         </p:txBody>
       </p:sp>
@@ -2794,13 +2951,6 @@
 <file path=ppt/slides/slide2.xml><?xml version="1.0" encoding="utf-8"?>
 <p:sld xmlns:a="http://schemas.openxmlformats.org/drawingml/2006/main" xmlns:r="http://schemas.openxmlformats.org/officeDocument/2006/relationships" xmlns:p="http://schemas.openxmlformats.org/presentationml/2006/main">
   <p:cSld name="Slide 2">
-    <p:bg>
-      <p:bgPr>
-        <a:solidFill>
-          <a:srgbClr val="1A1A1A"/>
-        </a:solidFill>
-      </p:bgPr>
-    </p:bg>
     <p:spTree>
       <p:nvGrpSpPr>
         <p:cNvPr id="1" name=""/>
@@ -2895,109 +3045,7 @@
       </p:sp>
       <p:sp>
         <p:nvSpPr>
-          <p:cNvPr id="4" name="Text 2"/>
-          <p:cNvSpPr txBox="1"/>
-          <p:nvPr/>
-        </p:nvSpPr>
-        <p:spPr>
-          <a:xfrm>
-            <a:off x="457200" y="4832604"/>
-            <a:ext cx="365760" cy="182880"/>
-          </a:xfrm>
-          <a:prstGeom prst="rect">
-            <a:avLst/>
-          </a:prstGeom>
-          <a:noFill/>
-          <a:ln/>
-        </p:spPr>
-        <p:txBody>
-          <a:bodyPr wrap="square" lIns="0" tIns="0" rIns="0" bIns="0" rtlCol="0" anchor="t"/>
-          <a:lstStyle/>
-          <a:p>
-            <a:pPr indent="0" marL="0">
-              <a:buNone/>
-            </a:pPr>
-            <a:r>
-              <a:rPr lang="en-US" sz="800" dirty="0">
-                <a:solidFill>
-                  <a:srgbClr val="7E7E7E"/>
-                </a:solidFill>
-                <a:latin typeface="Poppins SemiBold" pitchFamily="34" charset="0"/>
-                <a:ea typeface="Poppins SemiBold" pitchFamily="34" charset="-122"/>
-                <a:cs typeface="Poppins SemiBold" pitchFamily="34" charset="-120"/>
-              </a:rPr>
-              <a:t>2</a:t>
-            </a:r>
-            <a:endParaRPr lang="en-US" sz="800" dirty="0"/>
-          </a:p>
-        </p:txBody>
-      </p:sp>
-      <p:sp>
-        <p:nvSpPr>
-          <p:cNvPr id="5" name="Text 3"/>
-          <p:cNvSpPr txBox="1"/>
-          <p:nvPr/>
-        </p:nvSpPr>
-        <p:spPr>
-          <a:xfrm>
-            <a:off x="868680" y="4832604"/>
-            <a:ext cx="5486400" cy="182880"/>
-          </a:xfrm>
-          <a:prstGeom prst="rect">
-            <a:avLst/>
-          </a:prstGeom>
-          <a:noFill/>
-          <a:ln/>
-        </p:spPr>
-        <p:txBody>
-          <a:bodyPr wrap="square" lIns="0" tIns="0" rIns="0" bIns="0" rtlCol="0" anchor="t"/>
-          <a:lstStyle/>
-          <a:p>
-            <a:pPr indent="0" marL="0">
-              <a:buNone/>
-            </a:pPr>
-            <a:r>
-              <a:rPr lang="en-US" sz="700" dirty="0">
-                <a:solidFill>
-                  <a:srgbClr val="7E7E7E"/>
-                </a:solidFill>
-                <a:latin typeface="Poppins" pitchFamily="34" charset="0"/>
-                <a:ea typeface="Poppins" pitchFamily="34" charset="-122"/>
-                <a:cs typeface="Poppins" pitchFamily="34" charset="-120"/>
-              </a:rPr>
-              <a:t>Sabio × minds + assembly  ·  VYVGART and EPSOLAY, the short version  ·  Confidential</a:t>
-            </a:r>
-            <a:endParaRPr lang="en-US" sz="700" dirty="0"/>
-          </a:p>
-        </p:txBody>
-      </p:sp>
-      <p:pic>
-        <p:nvPicPr>
-          <p:cNvPr id="6" name="Image 0" descr="/home/claude/benjaminbring-cloud/sabio-deck-builders-/assets/sabio-logo-white-sm.png">    </p:cNvPr>
-          <p:cNvPicPr>
-            <a:picLocks noChangeAspect="1"/>
-          </p:cNvPicPr>
-          <p:nvPr/>
-        </p:nvPicPr>
-        <p:blipFill>
-          <a:blip r:embed="rId1"/>
-          <a:stretch>
-            <a:fillRect/>
-          </a:stretch>
-        </p:blipFill>
-        <p:spPr>
-          <a:xfrm>
-            <a:off x="8028432" y="4805172"/>
-            <a:ext cx="647572" cy="155448"/>
-          </a:xfrm>
-          <a:prstGeom prst="rect">
-            <a:avLst/>
-          </a:prstGeom>
-        </p:spPr>
-      </p:pic>
-      <p:sp>
-        <p:nvSpPr>
-          <p:cNvPr id="7" name="Shape 4"/>
+          <p:cNvPr id="4" name="Shape 2"/>
           <p:cNvSpPr/>
           <p:nvPr/>
         </p:nvSpPr>
@@ -3022,7 +3070,7 @@
       </p:sp>
       <p:sp>
         <p:nvSpPr>
-          <p:cNvPr id="8" name="Text 5"/>
+          <p:cNvPr id="5" name="Text 3"/>
           <p:cNvSpPr txBox="1"/>
           <p:nvPr/>
         </p:nvSpPr>
@@ -3061,7 +3109,7 @@
       </p:sp>
       <p:sp>
         <p:nvSpPr>
-          <p:cNvPr id="9" name="Text 6"/>
+          <p:cNvPr id="6" name="Text 4"/>
           <p:cNvSpPr txBox="1"/>
           <p:nvPr/>
         </p:nvSpPr>
@@ -3100,7 +3148,7 @@
       </p:sp>
       <p:sp>
         <p:nvSpPr>
-          <p:cNvPr id="10" name="Text 7"/>
+          <p:cNvPr id="7" name="Text 5"/>
           <p:cNvSpPr txBox="1"/>
           <p:nvPr/>
         </p:nvSpPr>
@@ -3139,7 +3187,7 @@
       </p:sp>
       <p:sp>
         <p:nvSpPr>
-          <p:cNvPr id="11" name="Text 8"/>
+          <p:cNvPr id="8" name="Text 6"/>
           <p:cNvSpPr txBox="1"/>
           <p:nvPr/>
         </p:nvSpPr>
@@ -3178,7 +3226,7 @@
       </p:sp>
       <p:sp>
         <p:nvSpPr>
-          <p:cNvPr id="12" name="Text 9"/>
+          <p:cNvPr id="9" name="Text 7"/>
           <p:cNvSpPr txBox="1"/>
           <p:nvPr/>
         </p:nvSpPr>
@@ -3217,7 +3265,7 @@
       </p:sp>
       <p:sp>
         <p:nvSpPr>
-          <p:cNvPr id="13" name="Text 10"/>
+          <p:cNvPr id="10" name="Text 8"/>
           <p:cNvSpPr txBox="1"/>
           <p:nvPr/>
         </p:nvSpPr>
@@ -3256,7 +3304,7 @@
       </p:sp>
       <p:sp>
         <p:nvSpPr>
-          <p:cNvPr id="14" name="Text 11"/>
+          <p:cNvPr id="11" name="Text 9"/>
           <p:cNvSpPr txBox="1"/>
           <p:nvPr/>
         </p:nvSpPr>
@@ -3295,7 +3343,7 @@
       </p:sp>
       <p:sp>
         <p:nvSpPr>
-          <p:cNvPr id="15" name="Text 12"/>
+          <p:cNvPr id="12" name="Text 10"/>
           <p:cNvSpPr txBox="1"/>
           <p:nvPr/>
         </p:nvSpPr>
@@ -3334,7 +3382,7 @@
       </p:sp>
       <p:sp>
         <p:nvSpPr>
-          <p:cNvPr id="16" name="Text 13"/>
+          <p:cNvPr id="13" name="Text 11"/>
           <p:cNvSpPr txBox="1"/>
           <p:nvPr/>
         </p:nvSpPr>
@@ -3373,7 +3421,7 @@
       </p:sp>
       <p:sp>
         <p:nvSpPr>
-          <p:cNvPr id="17" name="Text 14"/>
+          <p:cNvPr id="14" name="Text 12"/>
           <p:cNvSpPr txBox="1"/>
           <p:nvPr/>
         </p:nvSpPr>
@@ -3407,6 +3455,54 @@
               <a:t>10% of homes stay unexposed, so brand lift and Rx lift read cleanly for each brand.</a:t>
             </a:r>
             <a:endParaRPr lang="en-US" sz="950" dirty="0"/>
+          </a:p>
+        </p:txBody>
+      </p:sp>
+      <p:sp>
+        <p:nvSpPr>
+          <p:cNvPr id="25" name="Slide Number Placeholder 0"/>
+          <p:cNvSpPr>
+            <a:spLocks noGrp="1"/>
+          </p:cNvSpPr>
+          <p:nvPr>
+            <p:ph type="sldNum" sz="quarter" idx="4294967295"/>
+          </p:nvPr>
+        </p:nvSpPr>
+        <p:spPr>
+          <a:xfrm>
+            <a:off x="457200" y="4832604"/>
+            <a:ext cx="365760" cy="182880"/>
+          </a:xfrm>
+          <a:prstGeom prst="rect">
+            <a:avLst/>
+          </a:prstGeom>
+          <a:extLst>
+            <a:ext uri="{C572A759-6A51-4108-AA02-DFA0A04FC94B}">
+              <ma14:wrappingTextBoxFlag xmlns:ma14="http://schemas.microsoft.com/office/mac/drawingml/2011/main" val="0"/>
+            </a:ext>
+          </a:extLst>
+        </p:spPr>
+        <p:txBody>
+          <a:bodyPr lIns="0" tIns="0" rIns="0" bIns="0"/>
+          <a:lstStyle>
+            <a:lvl1pPr>
+              <a:defRPr sz="800">
+                <a:solidFill>
+                  <a:srgbClr val="7E7E7E"/>
+                </a:solidFill>
+                <a:latin typeface="Poppins SemiBold"/>
+                <a:ea typeface="Poppins SemiBold"/>
+                <a:cs typeface="Poppins SemiBold"/>
+              </a:defRPr>
+            </a:lvl1pPr>
+          </a:lstStyle>
+          <a:p>
+            <a:pPr algn="l"/>
+            <a:fld id="{F7021451-1387-4CA6-816F-3879F97B5CBC}" type="slidenum">
+              <a:rPr b="0" lang="en-US"/>
+              <a:t>2</a:t>
+            </a:fld>
+            <a:endParaRPr lang="en-US"/>
           </a:p>
         </p:txBody>
       </p:sp>
@@ -3421,13 +3517,6 @@
 <file path=ppt/slides/slide3.xml><?xml version="1.0" encoding="utf-8"?>
 <p:sld xmlns:a="http://schemas.openxmlformats.org/drawingml/2006/main" xmlns:r="http://schemas.openxmlformats.org/officeDocument/2006/relationships" xmlns:p="http://schemas.openxmlformats.org/presentationml/2006/main">
   <p:cSld name="Slide 3">
-    <p:bg>
-      <p:bgPr>
-        <a:solidFill>
-          <a:srgbClr val="1A1A1A"/>
-        </a:solidFill>
-      </p:bgPr>
-    </p:bg>
     <p:spTree>
       <p:nvGrpSpPr>
         <p:cNvPr id="1" name=""/>
@@ -3561,109 +3650,7 @@
       </p:sp>
       <p:sp>
         <p:nvSpPr>
-          <p:cNvPr id="5" name="Text 3"/>
-          <p:cNvSpPr txBox="1"/>
-          <p:nvPr/>
-        </p:nvSpPr>
-        <p:spPr>
-          <a:xfrm>
-            <a:off x="457200" y="4832604"/>
-            <a:ext cx="365760" cy="182880"/>
-          </a:xfrm>
-          <a:prstGeom prst="rect">
-            <a:avLst/>
-          </a:prstGeom>
-          <a:noFill/>
-          <a:ln/>
-        </p:spPr>
-        <p:txBody>
-          <a:bodyPr wrap="square" lIns="0" tIns="0" rIns="0" bIns="0" rtlCol="0" anchor="t"/>
-          <a:lstStyle/>
-          <a:p>
-            <a:pPr indent="0" marL="0">
-              <a:buNone/>
-            </a:pPr>
-            <a:r>
-              <a:rPr lang="en-US" sz="800" dirty="0">
-                <a:solidFill>
-                  <a:srgbClr val="7E7E7E"/>
-                </a:solidFill>
-                <a:latin typeface="Poppins SemiBold" pitchFamily="34" charset="0"/>
-                <a:ea typeface="Poppins SemiBold" pitchFamily="34" charset="-122"/>
-                <a:cs typeface="Poppins SemiBold" pitchFamily="34" charset="-120"/>
-              </a:rPr>
-              <a:t>3</a:t>
-            </a:r>
-            <a:endParaRPr lang="en-US" sz="800" dirty="0"/>
-          </a:p>
-        </p:txBody>
-      </p:sp>
-      <p:sp>
-        <p:nvSpPr>
-          <p:cNvPr id="6" name="Text 4"/>
-          <p:cNvSpPr txBox="1"/>
-          <p:nvPr/>
-        </p:nvSpPr>
-        <p:spPr>
-          <a:xfrm>
-            <a:off x="868680" y="4832604"/>
-            <a:ext cx="5486400" cy="182880"/>
-          </a:xfrm>
-          <a:prstGeom prst="rect">
-            <a:avLst/>
-          </a:prstGeom>
-          <a:noFill/>
-          <a:ln/>
-        </p:spPr>
-        <p:txBody>
-          <a:bodyPr wrap="square" lIns="0" tIns="0" rIns="0" bIns="0" rtlCol="0" anchor="t"/>
-          <a:lstStyle/>
-          <a:p>
-            <a:pPr indent="0" marL="0">
-              <a:buNone/>
-            </a:pPr>
-            <a:r>
-              <a:rPr lang="en-US" sz="700" dirty="0">
-                <a:solidFill>
-                  <a:srgbClr val="7E7E7E"/>
-                </a:solidFill>
-                <a:latin typeface="Poppins" pitchFamily="34" charset="0"/>
-                <a:ea typeface="Poppins" pitchFamily="34" charset="-122"/>
-                <a:cs typeface="Poppins" pitchFamily="34" charset="-120"/>
-              </a:rPr>
-              <a:t>Sabio × minds + assembly  ·  VYVGART and EPSOLAY, the short version  ·  Confidential</a:t>
-            </a:r>
-            <a:endParaRPr lang="en-US" sz="700" dirty="0"/>
-          </a:p>
-        </p:txBody>
-      </p:sp>
-      <p:pic>
-        <p:nvPicPr>
-          <p:cNvPr id="7" name="Image 0" descr="/home/claude/benjaminbring-cloud/sabio-deck-builders-/assets/sabio-logo-white-sm.png">    </p:cNvPr>
-          <p:cNvPicPr>
-            <a:picLocks noChangeAspect="1"/>
-          </p:cNvPicPr>
-          <p:nvPr/>
-        </p:nvPicPr>
-        <p:blipFill>
-          <a:blip r:embed="rId1"/>
-          <a:stretch>
-            <a:fillRect/>
-          </a:stretch>
-        </p:blipFill>
-        <p:spPr>
-          <a:xfrm>
-            <a:off x="8028432" y="4805172"/>
-            <a:ext cx="647572" cy="155448"/>
-          </a:xfrm>
-          <a:prstGeom prst="rect">
-            <a:avLst/>
-          </a:prstGeom>
-        </p:spPr>
-      </p:pic>
-      <p:sp>
-        <p:nvSpPr>
-          <p:cNvPr id="8" name="Shape 5"/>
+          <p:cNvPr id="5" name="Shape 3"/>
           <p:cNvSpPr/>
           <p:nvPr/>
         </p:nvSpPr>
@@ -3688,7 +3675,7 @@
       </p:sp>
       <p:sp>
         <p:nvSpPr>
-          <p:cNvPr id="9" name="Text 6"/>
+          <p:cNvPr id="6" name="Text 4"/>
           <p:cNvSpPr txBox="1"/>
           <p:nvPr/>
         </p:nvSpPr>
@@ -3727,7 +3714,7 @@
       </p:sp>
       <p:sp>
         <p:nvSpPr>
-          <p:cNvPr id="10" name="Text 7"/>
+          <p:cNvPr id="7" name="Text 5"/>
           <p:cNvSpPr txBox="1"/>
           <p:nvPr/>
         </p:nvSpPr>
@@ -3766,7 +3753,7 @@
       </p:sp>
       <p:sp>
         <p:nvSpPr>
-          <p:cNvPr id="11" name="Text 8"/>
+          <p:cNvPr id="8" name="Text 6"/>
           <p:cNvSpPr txBox="1"/>
           <p:nvPr/>
         </p:nvSpPr>
@@ -3805,7 +3792,7 @@
       </p:sp>
       <p:sp>
         <p:nvSpPr>
-          <p:cNvPr id="12" name="Text 9"/>
+          <p:cNvPr id="9" name="Text 7"/>
           <p:cNvSpPr txBox="1"/>
           <p:nvPr/>
         </p:nvSpPr>
@@ -3844,7 +3831,7 @@
       </p:sp>
       <p:sp>
         <p:nvSpPr>
-          <p:cNvPr id="13" name="Text 10"/>
+          <p:cNvPr id="10" name="Text 8"/>
           <p:cNvSpPr txBox="1"/>
           <p:nvPr/>
         </p:nvSpPr>
@@ -3883,7 +3870,7 @@
       </p:sp>
       <p:sp>
         <p:nvSpPr>
-          <p:cNvPr id="14" name="Text 11"/>
+          <p:cNvPr id="11" name="Text 9"/>
           <p:cNvSpPr txBox="1"/>
           <p:nvPr/>
         </p:nvSpPr>
@@ -3922,7 +3909,7 @@
       </p:sp>
       <p:sp>
         <p:nvSpPr>
-          <p:cNvPr id="15" name="Shape 12"/>
+          <p:cNvPr id="12" name="Shape 10"/>
           <p:cNvSpPr/>
           <p:nvPr/>
         </p:nvSpPr>
@@ -3947,7 +3934,7 @@
       </p:sp>
       <p:sp>
         <p:nvSpPr>
-          <p:cNvPr id="16" name="Text 13"/>
+          <p:cNvPr id="13" name="Text 11"/>
           <p:cNvSpPr txBox="1"/>
           <p:nvPr/>
         </p:nvSpPr>
@@ -3986,7 +3973,7 @@
       </p:sp>
       <p:sp>
         <p:nvSpPr>
-          <p:cNvPr id="17" name="Text 14"/>
+          <p:cNvPr id="14" name="Text 12"/>
           <p:cNvSpPr txBox="1"/>
           <p:nvPr/>
         </p:nvSpPr>
@@ -4025,7 +4012,7 @@
       </p:sp>
       <p:sp>
         <p:nvSpPr>
-          <p:cNvPr id="18" name="Shape 15"/>
+          <p:cNvPr id="15" name="Shape 13"/>
           <p:cNvSpPr/>
           <p:nvPr/>
         </p:nvSpPr>
@@ -4050,7 +4037,7 @@
       </p:sp>
       <p:sp>
         <p:nvSpPr>
-          <p:cNvPr id="19" name="Text 16"/>
+          <p:cNvPr id="16" name="Text 14"/>
           <p:cNvSpPr txBox="1"/>
           <p:nvPr/>
         </p:nvSpPr>
@@ -4089,7 +4076,7 @@
       </p:sp>
       <p:sp>
         <p:nvSpPr>
-          <p:cNvPr id="20" name="Text 17"/>
+          <p:cNvPr id="17" name="Text 15"/>
           <p:cNvSpPr txBox="1"/>
           <p:nvPr/>
         </p:nvSpPr>
@@ -4128,7 +4115,7 @@
       </p:sp>
       <p:sp>
         <p:nvSpPr>
-          <p:cNvPr id="21" name="Text 18"/>
+          <p:cNvPr id="18" name="Text 16"/>
           <p:cNvSpPr txBox="1"/>
           <p:nvPr/>
         </p:nvSpPr>
@@ -4167,7 +4154,7 @@
       </p:sp>
       <p:sp>
         <p:nvSpPr>
-          <p:cNvPr id="22" name="Text 19"/>
+          <p:cNvPr id="19" name="Text 17"/>
           <p:cNvSpPr txBox="1"/>
           <p:nvPr/>
         </p:nvSpPr>
@@ -4206,7 +4193,7 @@
       </p:sp>
       <p:sp>
         <p:nvSpPr>
-          <p:cNvPr id="23" name="Text 20"/>
+          <p:cNvPr id="20" name="Text 18"/>
           <p:cNvSpPr txBox="1"/>
           <p:nvPr/>
         </p:nvSpPr>
@@ -4245,7 +4232,7 @@
       </p:sp>
       <p:sp>
         <p:nvSpPr>
-          <p:cNvPr id="24" name="Text 21"/>
+          <p:cNvPr id="21" name="Text 19"/>
           <p:cNvSpPr txBox="1"/>
           <p:nvPr/>
         </p:nvSpPr>
@@ -4284,7 +4271,7 @@
       </p:sp>
       <p:sp>
         <p:nvSpPr>
-          <p:cNvPr id="25" name="Shape 22"/>
+          <p:cNvPr id="22" name="Shape 20"/>
           <p:cNvSpPr/>
           <p:nvPr/>
         </p:nvSpPr>
@@ -4309,7 +4296,7 @@
       </p:sp>
       <p:sp>
         <p:nvSpPr>
-          <p:cNvPr id="26" name="Text 23"/>
+          <p:cNvPr id="23" name="Text 21"/>
           <p:cNvSpPr txBox="1"/>
           <p:nvPr/>
         </p:nvSpPr>
@@ -4348,7 +4335,7 @@
       </p:sp>
       <p:sp>
         <p:nvSpPr>
-          <p:cNvPr id="27" name="Text 24"/>
+          <p:cNvPr id="24" name="Text 22"/>
           <p:cNvSpPr txBox="1"/>
           <p:nvPr/>
         </p:nvSpPr>
@@ -4387,7 +4374,7 @@
       </p:sp>
       <p:sp>
         <p:nvSpPr>
-          <p:cNvPr id="28" name="Shape 25"/>
+          <p:cNvPr id="25" name="Shape 23"/>
           <p:cNvSpPr/>
           <p:nvPr/>
         </p:nvSpPr>
@@ -4412,7 +4399,7 @@
       </p:sp>
       <p:sp>
         <p:nvSpPr>
-          <p:cNvPr id="29" name="Text 26"/>
+          <p:cNvPr id="26" name="Text 24"/>
           <p:cNvSpPr txBox="1"/>
           <p:nvPr/>
         </p:nvSpPr>
@@ -4451,7 +4438,7 @@
       </p:sp>
       <p:sp>
         <p:nvSpPr>
-          <p:cNvPr id="30" name="Text 27"/>
+          <p:cNvPr id="27" name="Text 25"/>
           <p:cNvSpPr txBox="1"/>
           <p:nvPr/>
         </p:nvSpPr>
@@ -4490,7 +4477,7 @@
       </p:sp>
       <p:sp>
         <p:nvSpPr>
-          <p:cNvPr id="31" name="Text 28"/>
+          <p:cNvPr id="28" name="Text 26"/>
           <p:cNvSpPr txBox="1"/>
           <p:nvPr/>
         </p:nvSpPr>
@@ -4529,7 +4516,7 @@
       </p:sp>
       <p:sp>
         <p:nvSpPr>
-          <p:cNvPr id="32" name="Text 29"/>
+          <p:cNvPr id="29" name="Text 27"/>
           <p:cNvSpPr txBox="1"/>
           <p:nvPr/>
         </p:nvSpPr>
@@ -4568,7 +4555,7 @@
       </p:sp>
       <p:sp>
         <p:nvSpPr>
-          <p:cNvPr id="33" name="Text 30"/>
+          <p:cNvPr id="30" name="Text 28"/>
           <p:cNvSpPr txBox="1"/>
           <p:nvPr/>
         </p:nvSpPr>
@@ -4607,7 +4594,7 @@
       </p:sp>
       <p:sp>
         <p:nvSpPr>
-          <p:cNvPr id="34" name="Text 31"/>
+          <p:cNvPr id="31" name="Text 29"/>
           <p:cNvSpPr txBox="1"/>
           <p:nvPr/>
         </p:nvSpPr>
@@ -4646,7 +4633,7 @@
       </p:sp>
       <p:sp>
         <p:nvSpPr>
-          <p:cNvPr id="35" name="Shape 32"/>
+          <p:cNvPr id="32" name="Shape 30"/>
           <p:cNvSpPr/>
           <p:nvPr/>
         </p:nvSpPr>
@@ -4671,7 +4658,7 @@
       </p:sp>
       <p:sp>
         <p:nvSpPr>
-          <p:cNvPr id="36" name="Text 33"/>
+          <p:cNvPr id="33" name="Text 31"/>
           <p:cNvSpPr txBox="1"/>
           <p:nvPr/>
         </p:nvSpPr>
@@ -4710,7 +4697,7 @@
       </p:sp>
       <p:sp>
         <p:nvSpPr>
-          <p:cNvPr id="37" name="Text 34"/>
+          <p:cNvPr id="34" name="Text 32"/>
           <p:cNvSpPr txBox="1"/>
           <p:nvPr/>
         </p:nvSpPr>
@@ -4744,6 +4731,54 @@
               <a:t>CTV ~150K homes</a:t>
             </a:r>
             <a:endParaRPr lang="en-US" sz="800" dirty="0"/>
+          </a:p>
+        </p:txBody>
+      </p:sp>
+      <p:sp>
+        <p:nvSpPr>
+          <p:cNvPr id="25" name="Slide Number Placeholder 0"/>
+          <p:cNvSpPr>
+            <a:spLocks noGrp="1"/>
+          </p:cNvSpPr>
+          <p:nvPr>
+            <p:ph type="sldNum" sz="quarter" idx="4294967295"/>
+          </p:nvPr>
+        </p:nvSpPr>
+        <p:spPr>
+          <a:xfrm>
+            <a:off x="457200" y="4832604"/>
+            <a:ext cx="365760" cy="182880"/>
+          </a:xfrm>
+          <a:prstGeom prst="rect">
+            <a:avLst/>
+          </a:prstGeom>
+          <a:extLst>
+            <a:ext uri="{C572A759-6A51-4108-AA02-DFA0A04FC94B}">
+              <ma14:wrappingTextBoxFlag xmlns:ma14="http://schemas.microsoft.com/office/mac/drawingml/2011/main" val="0"/>
+            </a:ext>
+          </a:extLst>
+        </p:spPr>
+        <p:txBody>
+          <a:bodyPr lIns="0" tIns="0" rIns="0" bIns="0"/>
+          <a:lstStyle>
+            <a:lvl1pPr>
+              <a:defRPr sz="800">
+                <a:solidFill>
+                  <a:srgbClr val="7E7E7E"/>
+                </a:solidFill>
+                <a:latin typeface="Poppins SemiBold"/>
+                <a:ea typeface="Poppins SemiBold"/>
+                <a:cs typeface="Poppins SemiBold"/>
+              </a:defRPr>
+            </a:lvl1pPr>
+          </a:lstStyle>
+          <a:p>
+            <a:pPr algn="l"/>
+            <a:fld id="{F7021451-1387-4CA6-816F-3879F97B5CBC}" type="slidenum">
+              <a:rPr b="0" lang="en-US"/>
+              <a:t>3</a:t>
+            </a:fld>
+            <a:endParaRPr lang="en-US"/>
           </a:p>
         </p:txBody>
       </p:sp>
@@ -4758,13 +4793,6 @@
 <file path=ppt/slides/slide4.xml><?xml version="1.0" encoding="utf-8"?>
 <p:sld xmlns:a="http://schemas.openxmlformats.org/drawingml/2006/main" xmlns:r="http://schemas.openxmlformats.org/officeDocument/2006/relationships" xmlns:p="http://schemas.openxmlformats.org/presentationml/2006/main">
   <p:cSld name="Slide 4">
-    <p:bg>
-      <p:bgPr>
-        <a:solidFill>
-          <a:srgbClr val="1A1A1A"/>
-        </a:solidFill>
-      </p:bgPr>
-    </p:bg>
     <p:spTree>
       <p:nvGrpSpPr>
         <p:cNvPr id="1" name=""/>
@@ -4898,109 +4926,7 @@
       </p:sp>
       <p:sp>
         <p:nvSpPr>
-          <p:cNvPr id="5" name="Text 3"/>
-          <p:cNvSpPr txBox="1"/>
-          <p:nvPr/>
-        </p:nvSpPr>
-        <p:spPr>
-          <a:xfrm>
-            <a:off x="457200" y="4832604"/>
-            <a:ext cx="365760" cy="182880"/>
-          </a:xfrm>
-          <a:prstGeom prst="rect">
-            <a:avLst/>
-          </a:prstGeom>
-          <a:noFill/>
-          <a:ln/>
-        </p:spPr>
-        <p:txBody>
-          <a:bodyPr wrap="square" lIns="0" tIns="0" rIns="0" bIns="0" rtlCol="0" anchor="t"/>
-          <a:lstStyle/>
-          <a:p>
-            <a:pPr indent="0" marL="0">
-              <a:buNone/>
-            </a:pPr>
-            <a:r>
-              <a:rPr lang="en-US" sz="800" dirty="0">
-                <a:solidFill>
-                  <a:srgbClr val="7E7E7E"/>
-                </a:solidFill>
-                <a:latin typeface="Poppins SemiBold" pitchFamily="34" charset="0"/>
-                <a:ea typeface="Poppins SemiBold" pitchFamily="34" charset="-122"/>
-                <a:cs typeface="Poppins SemiBold" pitchFamily="34" charset="-120"/>
-              </a:rPr>
-              <a:t>4</a:t>
-            </a:r>
-            <a:endParaRPr lang="en-US" sz="800" dirty="0"/>
-          </a:p>
-        </p:txBody>
-      </p:sp>
-      <p:sp>
-        <p:nvSpPr>
-          <p:cNvPr id="6" name="Text 4"/>
-          <p:cNvSpPr txBox="1"/>
-          <p:nvPr/>
-        </p:nvSpPr>
-        <p:spPr>
-          <a:xfrm>
-            <a:off x="868680" y="4832604"/>
-            <a:ext cx="5486400" cy="182880"/>
-          </a:xfrm>
-          <a:prstGeom prst="rect">
-            <a:avLst/>
-          </a:prstGeom>
-          <a:noFill/>
-          <a:ln/>
-        </p:spPr>
-        <p:txBody>
-          <a:bodyPr wrap="square" lIns="0" tIns="0" rIns="0" bIns="0" rtlCol="0" anchor="t"/>
-          <a:lstStyle/>
-          <a:p>
-            <a:pPr indent="0" marL="0">
-              <a:buNone/>
-            </a:pPr>
-            <a:r>
-              <a:rPr lang="en-US" sz="700" dirty="0">
-                <a:solidFill>
-                  <a:srgbClr val="7E7E7E"/>
-                </a:solidFill>
-                <a:latin typeface="Poppins" pitchFamily="34" charset="0"/>
-                <a:ea typeface="Poppins" pitchFamily="34" charset="-122"/>
-                <a:cs typeface="Poppins" pitchFamily="34" charset="-120"/>
-              </a:rPr>
-              <a:t>Sabio × minds + assembly  ·  VYVGART and EPSOLAY, the short version  ·  Confidential</a:t>
-            </a:r>
-            <a:endParaRPr lang="en-US" sz="700" dirty="0"/>
-          </a:p>
-        </p:txBody>
-      </p:sp>
-      <p:pic>
-        <p:nvPicPr>
-          <p:cNvPr id="7" name="Image 0" descr="/home/claude/benjaminbring-cloud/sabio-deck-builders-/assets/sabio-logo-white-sm.png">    </p:cNvPr>
-          <p:cNvPicPr>
-            <a:picLocks noChangeAspect="1"/>
-          </p:cNvPicPr>
-          <p:nvPr/>
-        </p:nvPicPr>
-        <p:blipFill>
-          <a:blip r:embed="rId1"/>
-          <a:stretch>
-            <a:fillRect/>
-          </a:stretch>
-        </p:blipFill>
-        <p:spPr>
-          <a:xfrm>
-            <a:off x="8028432" y="4805172"/>
-            <a:ext cx="647572" cy="155448"/>
-          </a:xfrm>
-          <a:prstGeom prst="rect">
-            <a:avLst/>
-          </a:prstGeom>
-        </p:spPr>
-      </p:pic>
-      <p:sp>
-        <p:nvSpPr>
-          <p:cNvPr id="8" name="Shape 5"/>
+          <p:cNvPr id="5" name="Shape 3"/>
           <p:cNvSpPr/>
           <p:nvPr/>
         </p:nvSpPr>
@@ -5025,7 +4951,7 @@
       </p:sp>
       <p:sp>
         <p:nvSpPr>
-          <p:cNvPr id="9" name="Text 6"/>
+          <p:cNvPr id="6" name="Text 4"/>
           <p:cNvSpPr txBox="1"/>
           <p:nvPr/>
         </p:nvSpPr>
@@ -5064,7 +4990,7 @@
       </p:sp>
       <p:sp>
         <p:nvSpPr>
-          <p:cNvPr id="10" name="Text 7"/>
+          <p:cNvPr id="7" name="Text 5"/>
           <p:cNvSpPr txBox="1"/>
           <p:nvPr/>
         </p:nvSpPr>
@@ -5103,7 +5029,7 @@
       </p:sp>
       <p:sp>
         <p:nvSpPr>
-          <p:cNvPr id="11" name="Text 8"/>
+          <p:cNvPr id="8" name="Text 6"/>
           <p:cNvSpPr txBox="1"/>
           <p:nvPr/>
         </p:nvSpPr>
@@ -5142,7 +5068,7 @@
       </p:sp>
       <p:sp>
         <p:nvSpPr>
-          <p:cNvPr id="12" name="Text 9"/>
+          <p:cNvPr id="9" name="Text 7"/>
           <p:cNvSpPr txBox="1"/>
           <p:nvPr/>
         </p:nvSpPr>
@@ -5181,7 +5107,7 @@
       </p:sp>
       <p:sp>
         <p:nvSpPr>
-          <p:cNvPr id="13" name="Text 10"/>
+          <p:cNvPr id="10" name="Text 8"/>
           <p:cNvSpPr txBox="1"/>
           <p:nvPr/>
         </p:nvSpPr>
@@ -5220,7 +5146,7 @@
       </p:sp>
       <p:sp>
         <p:nvSpPr>
-          <p:cNvPr id="14" name="Text 11"/>
+          <p:cNvPr id="11" name="Text 9"/>
           <p:cNvSpPr txBox="1"/>
           <p:nvPr/>
         </p:nvSpPr>
@@ -5259,7 +5185,7 @@
       </p:sp>
       <p:sp>
         <p:nvSpPr>
-          <p:cNvPr id="15" name="Shape 12"/>
+          <p:cNvPr id="12" name="Shape 10"/>
           <p:cNvSpPr/>
           <p:nvPr/>
         </p:nvSpPr>
@@ -5284,7 +5210,7 @@
       </p:sp>
       <p:sp>
         <p:nvSpPr>
-          <p:cNvPr id="16" name="Text 13"/>
+          <p:cNvPr id="13" name="Text 11"/>
           <p:cNvSpPr txBox="1"/>
           <p:nvPr/>
         </p:nvSpPr>
@@ -5323,7 +5249,7 @@
       </p:sp>
       <p:sp>
         <p:nvSpPr>
-          <p:cNvPr id="17" name="Text 14"/>
+          <p:cNvPr id="14" name="Text 12"/>
           <p:cNvSpPr txBox="1"/>
           <p:nvPr/>
         </p:nvSpPr>
@@ -5362,7 +5288,7 @@
       </p:sp>
       <p:sp>
         <p:nvSpPr>
-          <p:cNvPr id="18" name="Shape 15"/>
+          <p:cNvPr id="15" name="Shape 13"/>
           <p:cNvSpPr/>
           <p:nvPr/>
         </p:nvSpPr>
@@ -5387,7 +5313,7 @@
       </p:sp>
       <p:sp>
         <p:nvSpPr>
-          <p:cNvPr id="19" name="Text 16"/>
+          <p:cNvPr id="16" name="Text 14"/>
           <p:cNvSpPr txBox="1"/>
           <p:nvPr/>
         </p:nvSpPr>
@@ -5426,7 +5352,7 @@
       </p:sp>
       <p:sp>
         <p:nvSpPr>
-          <p:cNvPr id="20" name="Text 17"/>
+          <p:cNvPr id="17" name="Text 15"/>
           <p:cNvSpPr txBox="1"/>
           <p:nvPr/>
         </p:nvSpPr>
@@ -5465,7 +5391,7 @@
       </p:sp>
       <p:sp>
         <p:nvSpPr>
-          <p:cNvPr id="21" name="Text 18"/>
+          <p:cNvPr id="18" name="Text 16"/>
           <p:cNvSpPr txBox="1"/>
           <p:nvPr/>
         </p:nvSpPr>
@@ -5504,7 +5430,7 @@
       </p:sp>
       <p:sp>
         <p:nvSpPr>
-          <p:cNvPr id="22" name="Text 19"/>
+          <p:cNvPr id="19" name="Text 17"/>
           <p:cNvSpPr txBox="1"/>
           <p:nvPr/>
         </p:nvSpPr>
@@ -5543,7 +5469,7 @@
       </p:sp>
       <p:sp>
         <p:nvSpPr>
-          <p:cNvPr id="23" name="Text 20"/>
+          <p:cNvPr id="20" name="Text 18"/>
           <p:cNvSpPr txBox="1"/>
           <p:nvPr/>
         </p:nvSpPr>
@@ -5582,7 +5508,7 @@
       </p:sp>
       <p:sp>
         <p:nvSpPr>
-          <p:cNvPr id="24" name="Text 21"/>
+          <p:cNvPr id="21" name="Text 19"/>
           <p:cNvSpPr txBox="1"/>
           <p:nvPr/>
         </p:nvSpPr>
@@ -5621,7 +5547,7 @@
       </p:sp>
       <p:sp>
         <p:nvSpPr>
-          <p:cNvPr id="25" name="Shape 22"/>
+          <p:cNvPr id="22" name="Shape 20"/>
           <p:cNvSpPr/>
           <p:nvPr/>
         </p:nvSpPr>
@@ -5646,7 +5572,7 @@
       </p:sp>
       <p:sp>
         <p:nvSpPr>
-          <p:cNvPr id="26" name="Text 23"/>
+          <p:cNvPr id="23" name="Text 21"/>
           <p:cNvSpPr txBox="1"/>
           <p:nvPr/>
         </p:nvSpPr>
@@ -5685,7 +5611,7 @@
       </p:sp>
       <p:sp>
         <p:nvSpPr>
-          <p:cNvPr id="27" name="Text 24"/>
+          <p:cNvPr id="24" name="Text 22"/>
           <p:cNvSpPr txBox="1"/>
           <p:nvPr/>
         </p:nvSpPr>
@@ -5724,7 +5650,7 @@
       </p:sp>
       <p:sp>
         <p:nvSpPr>
-          <p:cNvPr id="28" name="Shape 25"/>
+          <p:cNvPr id="25" name="Shape 23"/>
           <p:cNvSpPr/>
           <p:nvPr/>
         </p:nvSpPr>
@@ -5749,7 +5675,7 @@
       </p:sp>
       <p:sp>
         <p:nvSpPr>
-          <p:cNvPr id="29" name="Text 26"/>
+          <p:cNvPr id="26" name="Text 24"/>
           <p:cNvSpPr txBox="1"/>
           <p:nvPr/>
         </p:nvSpPr>
@@ -5788,7 +5714,7 @@
       </p:sp>
       <p:sp>
         <p:nvSpPr>
-          <p:cNvPr id="30" name="Text 27"/>
+          <p:cNvPr id="27" name="Text 25"/>
           <p:cNvSpPr txBox="1"/>
           <p:nvPr/>
         </p:nvSpPr>
@@ -5827,7 +5753,7 @@
       </p:sp>
       <p:sp>
         <p:nvSpPr>
-          <p:cNvPr id="31" name="Text 28"/>
+          <p:cNvPr id="28" name="Text 26"/>
           <p:cNvSpPr txBox="1"/>
           <p:nvPr/>
         </p:nvSpPr>
@@ -5866,7 +5792,7 @@
       </p:sp>
       <p:sp>
         <p:nvSpPr>
-          <p:cNvPr id="32" name="Text 29"/>
+          <p:cNvPr id="29" name="Text 27"/>
           <p:cNvSpPr txBox="1"/>
           <p:nvPr/>
         </p:nvSpPr>
@@ -5905,7 +5831,7 @@
       </p:sp>
       <p:sp>
         <p:nvSpPr>
-          <p:cNvPr id="33" name="Text 30"/>
+          <p:cNvPr id="30" name="Text 28"/>
           <p:cNvSpPr txBox="1"/>
           <p:nvPr/>
         </p:nvSpPr>
@@ -5944,7 +5870,7 @@
       </p:sp>
       <p:sp>
         <p:nvSpPr>
-          <p:cNvPr id="34" name="Text 31"/>
+          <p:cNvPr id="31" name="Text 29"/>
           <p:cNvSpPr txBox="1"/>
           <p:nvPr/>
         </p:nvSpPr>
@@ -5983,7 +5909,7 @@
       </p:sp>
       <p:sp>
         <p:nvSpPr>
-          <p:cNvPr id="35" name="Shape 32"/>
+          <p:cNvPr id="32" name="Shape 30"/>
           <p:cNvSpPr/>
           <p:nvPr/>
         </p:nvSpPr>
@@ -6008,7 +5934,7 @@
       </p:sp>
       <p:sp>
         <p:nvSpPr>
-          <p:cNvPr id="36" name="Text 33"/>
+          <p:cNvPr id="33" name="Text 31"/>
           <p:cNvSpPr txBox="1"/>
           <p:nvPr/>
         </p:nvSpPr>
@@ -6047,7 +5973,7 @@
       </p:sp>
       <p:sp>
         <p:nvSpPr>
-          <p:cNvPr id="37" name="Text 34"/>
+          <p:cNvPr id="34" name="Text 32"/>
           <p:cNvSpPr txBox="1"/>
           <p:nvPr/>
         </p:nvSpPr>
@@ -6081,6 +6007,54 @@
               <a:t>CTV ~400K homes</a:t>
             </a:r>
             <a:endParaRPr lang="en-US" sz="800" dirty="0"/>
+          </a:p>
+        </p:txBody>
+      </p:sp>
+      <p:sp>
+        <p:nvSpPr>
+          <p:cNvPr id="25" name="Slide Number Placeholder 0"/>
+          <p:cNvSpPr>
+            <a:spLocks noGrp="1"/>
+          </p:cNvSpPr>
+          <p:nvPr>
+            <p:ph type="sldNum" sz="quarter" idx="4294967295"/>
+          </p:nvPr>
+        </p:nvSpPr>
+        <p:spPr>
+          <a:xfrm>
+            <a:off x="457200" y="4832604"/>
+            <a:ext cx="365760" cy="182880"/>
+          </a:xfrm>
+          <a:prstGeom prst="rect">
+            <a:avLst/>
+          </a:prstGeom>
+          <a:extLst>
+            <a:ext uri="{C572A759-6A51-4108-AA02-DFA0A04FC94B}">
+              <ma14:wrappingTextBoxFlag xmlns:ma14="http://schemas.microsoft.com/office/mac/drawingml/2011/main" val="0"/>
+            </a:ext>
+          </a:extLst>
+        </p:spPr>
+        <p:txBody>
+          <a:bodyPr lIns="0" tIns="0" rIns="0" bIns="0"/>
+          <a:lstStyle>
+            <a:lvl1pPr>
+              <a:defRPr sz="800">
+                <a:solidFill>
+                  <a:srgbClr val="7E7E7E"/>
+                </a:solidFill>
+                <a:latin typeface="Poppins SemiBold"/>
+                <a:ea typeface="Poppins SemiBold"/>
+                <a:cs typeface="Poppins SemiBold"/>
+              </a:defRPr>
+            </a:lvl1pPr>
+          </a:lstStyle>
+          <a:p>
+            <a:pPr algn="l"/>
+            <a:fld id="{F7021451-1387-4CA6-816F-3879F97B5CBC}" type="slidenum">
+              <a:rPr b="0" lang="en-US"/>
+              <a:t>4</a:t>
+            </a:fld>
+            <a:endParaRPr lang="en-US"/>
           </a:p>
         </p:txBody>
       </p:sp>
@@ -6095,13 +6069,6 @@
 <file path=ppt/slides/slide5.xml><?xml version="1.0" encoding="utf-8"?>
 <p:sld xmlns:a="http://schemas.openxmlformats.org/drawingml/2006/main" xmlns:r="http://schemas.openxmlformats.org/officeDocument/2006/relationships" xmlns:p="http://schemas.openxmlformats.org/presentationml/2006/main">
   <p:cSld name="Slide 5">
-    <p:bg>
-      <p:bgPr>
-        <a:solidFill>
-          <a:srgbClr val="1A1A1A"/>
-        </a:solidFill>
-      </p:bgPr>
-    </p:bg>
     <p:spTree>
       <p:nvGrpSpPr>
         <p:cNvPr id="1" name=""/>
@@ -6235,109 +6202,7 @@
       </p:sp>
       <p:sp>
         <p:nvSpPr>
-          <p:cNvPr id="5" name="Text 3"/>
-          <p:cNvSpPr txBox="1"/>
-          <p:nvPr/>
-        </p:nvSpPr>
-        <p:spPr>
-          <a:xfrm>
-            <a:off x="457200" y="4832604"/>
-            <a:ext cx="365760" cy="182880"/>
-          </a:xfrm>
-          <a:prstGeom prst="rect">
-            <a:avLst/>
-          </a:prstGeom>
-          <a:noFill/>
-          <a:ln/>
-        </p:spPr>
-        <p:txBody>
-          <a:bodyPr wrap="square" lIns="0" tIns="0" rIns="0" bIns="0" rtlCol="0" anchor="t"/>
-          <a:lstStyle/>
-          <a:p>
-            <a:pPr indent="0" marL="0">
-              <a:buNone/>
-            </a:pPr>
-            <a:r>
-              <a:rPr lang="en-US" sz="800" dirty="0">
-                <a:solidFill>
-                  <a:srgbClr val="7E7E7E"/>
-                </a:solidFill>
-                <a:latin typeface="Poppins SemiBold" pitchFamily="34" charset="0"/>
-                <a:ea typeface="Poppins SemiBold" pitchFamily="34" charset="-122"/>
-                <a:cs typeface="Poppins SemiBold" pitchFamily="34" charset="-120"/>
-              </a:rPr>
-              <a:t>5</a:t>
-            </a:r>
-            <a:endParaRPr lang="en-US" sz="800" dirty="0"/>
-          </a:p>
-        </p:txBody>
-      </p:sp>
-      <p:sp>
-        <p:nvSpPr>
-          <p:cNvPr id="6" name="Text 4"/>
-          <p:cNvSpPr txBox="1"/>
-          <p:nvPr/>
-        </p:nvSpPr>
-        <p:spPr>
-          <a:xfrm>
-            <a:off x="868680" y="4832604"/>
-            <a:ext cx="5486400" cy="182880"/>
-          </a:xfrm>
-          <a:prstGeom prst="rect">
-            <a:avLst/>
-          </a:prstGeom>
-          <a:noFill/>
-          <a:ln/>
-        </p:spPr>
-        <p:txBody>
-          <a:bodyPr wrap="square" lIns="0" tIns="0" rIns="0" bIns="0" rtlCol="0" anchor="t"/>
-          <a:lstStyle/>
-          <a:p>
-            <a:pPr indent="0" marL="0">
-              <a:buNone/>
-            </a:pPr>
-            <a:r>
-              <a:rPr lang="en-US" sz="700" dirty="0">
-                <a:solidFill>
-                  <a:srgbClr val="7E7E7E"/>
-                </a:solidFill>
-                <a:latin typeface="Poppins" pitchFamily="34" charset="0"/>
-                <a:ea typeface="Poppins" pitchFamily="34" charset="-122"/>
-                <a:cs typeface="Poppins" pitchFamily="34" charset="-120"/>
-              </a:rPr>
-              <a:t>Sabio × minds + assembly  ·  VYVGART and EPSOLAY, the short version  ·  Confidential</a:t>
-            </a:r>
-            <a:endParaRPr lang="en-US" sz="700" dirty="0"/>
-          </a:p>
-        </p:txBody>
-      </p:sp>
-      <p:pic>
-        <p:nvPicPr>
-          <p:cNvPr id="7" name="Image 0" descr="/home/claude/benjaminbring-cloud/sabio-deck-builders-/assets/sabio-logo-white-sm.png">    </p:cNvPr>
-          <p:cNvPicPr>
-            <a:picLocks noChangeAspect="1"/>
-          </p:cNvPicPr>
-          <p:nvPr/>
-        </p:nvPicPr>
-        <p:blipFill>
-          <a:blip r:embed="rId1"/>
-          <a:stretch>
-            <a:fillRect/>
-          </a:stretch>
-        </p:blipFill>
-        <p:spPr>
-          <a:xfrm>
-            <a:off x="8028432" y="4805172"/>
-            <a:ext cx="647572" cy="155448"/>
-          </a:xfrm>
-          <a:prstGeom prst="rect">
-            <a:avLst/>
-          </a:prstGeom>
-        </p:spPr>
-      </p:pic>
-      <p:sp>
-        <p:nvSpPr>
-          <p:cNvPr id="8" name="Shape 5"/>
+          <p:cNvPr id="5" name="Shape 3"/>
           <p:cNvSpPr/>
           <p:nvPr/>
         </p:nvSpPr>
@@ -6362,7 +6227,7 @@
       </p:sp>
       <p:sp>
         <p:nvSpPr>
-          <p:cNvPr id="9" name="Text 6"/>
+          <p:cNvPr id="6" name="Text 4"/>
           <p:cNvSpPr txBox="1"/>
           <p:nvPr/>
         </p:nvSpPr>
@@ -6401,7 +6266,7 @@
       </p:sp>
       <p:sp>
         <p:nvSpPr>
-          <p:cNvPr id="10" name="Text 7"/>
+          <p:cNvPr id="7" name="Text 5"/>
           <p:cNvSpPr txBox="1"/>
           <p:nvPr/>
         </p:nvSpPr>
@@ -6440,7 +6305,7 @@
       </p:sp>
       <p:sp>
         <p:nvSpPr>
-          <p:cNvPr id="11" name="Text 8"/>
+          <p:cNvPr id="8" name="Text 6"/>
           <p:cNvSpPr txBox="1"/>
           <p:nvPr/>
         </p:nvSpPr>
@@ -6479,7 +6344,7 @@
       </p:sp>
       <p:sp>
         <p:nvSpPr>
-          <p:cNvPr id="12" name="Text 9"/>
+          <p:cNvPr id="9" name="Text 7"/>
           <p:cNvSpPr txBox="1"/>
           <p:nvPr/>
         </p:nvSpPr>
@@ -6518,7 +6383,7 @@
       </p:sp>
       <p:sp>
         <p:nvSpPr>
-          <p:cNvPr id="13" name="Text 10"/>
+          <p:cNvPr id="10" name="Text 8"/>
           <p:cNvSpPr txBox="1"/>
           <p:nvPr/>
         </p:nvSpPr>
@@ -6557,7 +6422,7 @@
       </p:sp>
       <p:sp>
         <p:nvSpPr>
-          <p:cNvPr id="14" name="Text 11"/>
+          <p:cNvPr id="11" name="Text 9"/>
           <p:cNvSpPr txBox="1"/>
           <p:nvPr/>
         </p:nvSpPr>
@@ -6596,7 +6461,7 @@
       </p:sp>
       <p:sp>
         <p:nvSpPr>
-          <p:cNvPr id="15" name="Shape 12"/>
+          <p:cNvPr id="12" name="Shape 10"/>
           <p:cNvSpPr/>
           <p:nvPr/>
         </p:nvSpPr>
@@ -6621,7 +6486,7 @@
       </p:sp>
       <p:sp>
         <p:nvSpPr>
-          <p:cNvPr id="16" name="Text 13"/>
+          <p:cNvPr id="13" name="Text 11"/>
           <p:cNvSpPr txBox="1"/>
           <p:nvPr/>
         </p:nvSpPr>
@@ -6660,7 +6525,7 @@
       </p:sp>
       <p:sp>
         <p:nvSpPr>
-          <p:cNvPr id="17" name="Text 14"/>
+          <p:cNvPr id="14" name="Text 12"/>
           <p:cNvSpPr txBox="1"/>
           <p:nvPr/>
         </p:nvSpPr>
@@ -6699,7 +6564,7 @@
       </p:sp>
       <p:sp>
         <p:nvSpPr>
-          <p:cNvPr id="18" name="Shape 15"/>
+          <p:cNvPr id="15" name="Shape 13"/>
           <p:cNvSpPr/>
           <p:nvPr/>
         </p:nvSpPr>
@@ -6724,7 +6589,7 @@
       </p:sp>
       <p:sp>
         <p:nvSpPr>
-          <p:cNvPr id="19" name="Text 16"/>
+          <p:cNvPr id="16" name="Text 14"/>
           <p:cNvSpPr txBox="1"/>
           <p:nvPr/>
         </p:nvSpPr>
@@ -6763,7 +6628,7 @@
       </p:sp>
       <p:sp>
         <p:nvSpPr>
-          <p:cNvPr id="20" name="Text 17"/>
+          <p:cNvPr id="17" name="Text 15"/>
           <p:cNvSpPr txBox="1"/>
           <p:nvPr/>
         </p:nvSpPr>
@@ -6802,7 +6667,7 @@
       </p:sp>
       <p:sp>
         <p:nvSpPr>
-          <p:cNvPr id="21" name="Text 18"/>
+          <p:cNvPr id="18" name="Text 16"/>
           <p:cNvSpPr txBox="1"/>
           <p:nvPr/>
         </p:nvSpPr>
@@ -6841,7 +6706,7 @@
       </p:sp>
       <p:sp>
         <p:nvSpPr>
-          <p:cNvPr id="22" name="Text 19"/>
+          <p:cNvPr id="19" name="Text 17"/>
           <p:cNvSpPr txBox="1"/>
           <p:nvPr/>
         </p:nvSpPr>
@@ -6880,7 +6745,7 @@
       </p:sp>
       <p:sp>
         <p:nvSpPr>
-          <p:cNvPr id="23" name="Text 20"/>
+          <p:cNvPr id="20" name="Text 18"/>
           <p:cNvSpPr txBox="1"/>
           <p:nvPr/>
         </p:nvSpPr>
@@ -6919,7 +6784,7 @@
       </p:sp>
       <p:sp>
         <p:nvSpPr>
-          <p:cNvPr id="24" name="Text 21"/>
+          <p:cNvPr id="21" name="Text 19"/>
           <p:cNvSpPr txBox="1"/>
           <p:nvPr/>
         </p:nvSpPr>
@@ -6958,7 +6823,7 @@
       </p:sp>
       <p:sp>
         <p:nvSpPr>
-          <p:cNvPr id="25" name="Shape 22"/>
+          <p:cNvPr id="22" name="Shape 20"/>
           <p:cNvSpPr/>
           <p:nvPr/>
         </p:nvSpPr>
@@ -6983,7 +6848,7 @@
       </p:sp>
       <p:sp>
         <p:nvSpPr>
-          <p:cNvPr id="26" name="Text 23"/>
+          <p:cNvPr id="23" name="Text 21"/>
           <p:cNvSpPr txBox="1"/>
           <p:nvPr/>
         </p:nvSpPr>
@@ -7022,7 +6887,7 @@
       </p:sp>
       <p:sp>
         <p:nvSpPr>
-          <p:cNvPr id="27" name="Text 24"/>
+          <p:cNvPr id="24" name="Text 22"/>
           <p:cNvSpPr txBox="1"/>
           <p:nvPr/>
         </p:nvSpPr>
@@ -7061,7 +6926,7 @@
       </p:sp>
       <p:sp>
         <p:nvSpPr>
-          <p:cNvPr id="28" name="Shape 25"/>
+          <p:cNvPr id="25" name="Shape 23"/>
           <p:cNvSpPr/>
           <p:nvPr/>
         </p:nvSpPr>
@@ -7086,7 +6951,7 @@
       </p:sp>
       <p:sp>
         <p:nvSpPr>
-          <p:cNvPr id="29" name="Text 26"/>
+          <p:cNvPr id="26" name="Text 24"/>
           <p:cNvSpPr txBox="1"/>
           <p:nvPr/>
         </p:nvSpPr>
@@ -7125,7 +6990,7 @@
       </p:sp>
       <p:sp>
         <p:nvSpPr>
-          <p:cNvPr id="30" name="Text 27"/>
+          <p:cNvPr id="27" name="Text 25"/>
           <p:cNvSpPr txBox="1"/>
           <p:nvPr/>
         </p:nvSpPr>
@@ -7164,7 +7029,7 @@
       </p:sp>
       <p:sp>
         <p:nvSpPr>
-          <p:cNvPr id="31" name="Text 28"/>
+          <p:cNvPr id="28" name="Text 26"/>
           <p:cNvSpPr txBox="1"/>
           <p:nvPr/>
         </p:nvSpPr>
@@ -7203,7 +7068,7 @@
       </p:sp>
       <p:sp>
         <p:nvSpPr>
-          <p:cNvPr id="32" name="Text 29"/>
+          <p:cNvPr id="29" name="Text 27"/>
           <p:cNvSpPr txBox="1"/>
           <p:nvPr/>
         </p:nvSpPr>
@@ -7242,7 +7107,7 @@
       </p:sp>
       <p:sp>
         <p:nvSpPr>
-          <p:cNvPr id="33" name="Text 30"/>
+          <p:cNvPr id="30" name="Text 28"/>
           <p:cNvSpPr txBox="1"/>
           <p:nvPr/>
         </p:nvSpPr>
@@ -7281,7 +7146,7 @@
       </p:sp>
       <p:sp>
         <p:nvSpPr>
-          <p:cNvPr id="34" name="Text 31"/>
+          <p:cNvPr id="31" name="Text 29"/>
           <p:cNvSpPr txBox="1"/>
           <p:nvPr/>
         </p:nvSpPr>
@@ -7320,7 +7185,7 @@
       </p:sp>
       <p:sp>
         <p:nvSpPr>
-          <p:cNvPr id="35" name="Shape 32"/>
+          <p:cNvPr id="32" name="Shape 30"/>
           <p:cNvSpPr/>
           <p:nvPr/>
         </p:nvSpPr>
@@ -7345,7 +7210,7 @@
       </p:sp>
       <p:sp>
         <p:nvSpPr>
-          <p:cNvPr id="36" name="Text 33"/>
+          <p:cNvPr id="33" name="Text 31"/>
           <p:cNvSpPr txBox="1"/>
           <p:nvPr/>
         </p:nvSpPr>
@@ -7384,7 +7249,7 @@
       </p:sp>
       <p:sp>
         <p:nvSpPr>
-          <p:cNvPr id="37" name="Text 34"/>
+          <p:cNvPr id="34" name="Text 32"/>
           <p:cNvSpPr txBox="1"/>
           <p:nvPr/>
         </p:nvSpPr>
@@ -7418,6 +7283,54 @@
               <a:t>CTV ~1.5MM homes</a:t>
             </a:r>
             <a:endParaRPr lang="en-US" sz="800" dirty="0"/>
+          </a:p>
+        </p:txBody>
+      </p:sp>
+      <p:sp>
+        <p:nvSpPr>
+          <p:cNvPr id="25" name="Slide Number Placeholder 0"/>
+          <p:cNvSpPr>
+            <a:spLocks noGrp="1"/>
+          </p:cNvSpPr>
+          <p:nvPr>
+            <p:ph type="sldNum" sz="quarter" idx="4294967295"/>
+          </p:nvPr>
+        </p:nvSpPr>
+        <p:spPr>
+          <a:xfrm>
+            <a:off x="457200" y="4832604"/>
+            <a:ext cx="365760" cy="182880"/>
+          </a:xfrm>
+          <a:prstGeom prst="rect">
+            <a:avLst/>
+          </a:prstGeom>
+          <a:extLst>
+            <a:ext uri="{C572A759-6A51-4108-AA02-DFA0A04FC94B}">
+              <ma14:wrappingTextBoxFlag xmlns:ma14="http://schemas.microsoft.com/office/mac/drawingml/2011/main" val="0"/>
+            </a:ext>
+          </a:extLst>
+        </p:spPr>
+        <p:txBody>
+          <a:bodyPr lIns="0" tIns="0" rIns="0" bIns="0"/>
+          <a:lstStyle>
+            <a:lvl1pPr>
+              <a:defRPr sz="800">
+                <a:solidFill>
+                  <a:srgbClr val="7E7E7E"/>
+                </a:solidFill>
+                <a:latin typeface="Poppins SemiBold"/>
+                <a:ea typeface="Poppins SemiBold"/>
+                <a:cs typeface="Poppins SemiBold"/>
+              </a:defRPr>
+            </a:lvl1pPr>
+          </a:lstStyle>
+          <a:p>
+            <a:pPr algn="l"/>
+            <a:fld id="{F7021451-1387-4CA6-816F-3879F97B5CBC}" type="slidenum">
+              <a:rPr b="0" lang="en-US"/>
+              <a:t>5</a:t>
+            </a:fld>
+            <a:endParaRPr lang="en-US"/>
           </a:p>
         </p:txBody>
       </p:sp>
@@ -7432,13 +7345,6 @@
 <file path=ppt/slides/slide6.xml><?xml version="1.0" encoding="utf-8"?>
 <p:sld xmlns:a="http://schemas.openxmlformats.org/drawingml/2006/main" xmlns:r="http://schemas.openxmlformats.org/officeDocument/2006/relationships" xmlns:p="http://schemas.openxmlformats.org/presentationml/2006/main">
   <p:cSld name="Slide 6">
-    <p:bg>
-      <p:bgPr>
-        <a:solidFill>
-          <a:srgbClr val="1A1A1A"/>
-        </a:solidFill>
-      </p:bgPr>
-    </p:bg>
     <p:spTree>
       <p:nvGrpSpPr>
         <p:cNvPr id="1" name=""/>
@@ -7572,109 +7478,7 @@
       </p:sp>
       <p:sp>
         <p:nvSpPr>
-          <p:cNvPr id="5" name="Text 3"/>
-          <p:cNvSpPr txBox="1"/>
-          <p:nvPr/>
-        </p:nvSpPr>
-        <p:spPr>
-          <a:xfrm>
-            <a:off x="457200" y="4832604"/>
-            <a:ext cx="365760" cy="182880"/>
-          </a:xfrm>
-          <a:prstGeom prst="rect">
-            <a:avLst/>
-          </a:prstGeom>
-          <a:noFill/>
-          <a:ln/>
-        </p:spPr>
-        <p:txBody>
-          <a:bodyPr wrap="square" lIns="0" tIns="0" rIns="0" bIns="0" rtlCol="0" anchor="t"/>
-          <a:lstStyle/>
-          <a:p>
-            <a:pPr indent="0" marL="0">
-              <a:buNone/>
-            </a:pPr>
-            <a:r>
-              <a:rPr lang="en-US" sz="800" dirty="0">
-                <a:solidFill>
-                  <a:srgbClr val="7E7E7E"/>
-                </a:solidFill>
-                <a:latin typeface="Poppins SemiBold" pitchFamily="34" charset="0"/>
-                <a:ea typeface="Poppins SemiBold" pitchFamily="34" charset="-122"/>
-                <a:cs typeface="Poppins SemiBold" pitchFamily="34" charset="-120"/>
-              </a:rPr>
-              <a:t>6</a:t>
-            </a:r>
-            <a:endParaRPr lang="en-US" sz="800" dirty="0"/>
-          </a:p>
-        </p:txBody>
-      </p:sp>
-      <p:sp>
-        <p:nvSpPr>
-          <p:cNvPr id="6" name="Text 4"/>
-          <p:cNvSpPr txBox="1"/>
-          <p:nvPr/>
-        </p:nvSpPr>
-        <p:spPr>
-          <a:xfrm>
-            <a:off x="868680" y="4832604"/>
-            <a:ext cx="5486400" cy="182880"/>
-          </a:xfrm>
-          <a:prstGeom prst="rect">
-            <a:avLst/>
-          </a:prstGeom>
-          <a:noFill/>
-          <a:ln/>
-        </p:spPr>
-        <p:txBody>
-          <a:bodyPr wrap="square" lIns="0" tIns="0" rIns="0" bIns="0" rtlCol="0" anchor="t"/>
-          <a:lstStyle/>
-          <a:p>
-            <a:pPr indent="0" marL="0">
-              <a:buNone/>
-            </a:pPr>
-            <a:r>
-              <a:rPr lang="en-US" sz="700" dirty="0">
-                <a:solidFill>
-                  <a:srgbClr val="7E7E7E"/>
-                </a:solidFill>
-                <a:latin typeface="Poppins" pitchFamily="34" charset="0"/>
-                <a:ea typeface="Poppins" pitchFamily="34" charset="-122"/>
-                <a:cs typeface="Poppins" pitchFamily="34" charset="-120"/>
-              </a:rPr>
-              <a:t>Sabio × minds + assembly  ·  VYVGART and EPSOLAY, the short version  ·  Confidential</a:t>
-            </a:r>
-            <a:endParaRPr lang="en-US" sz="700" dirty="0"/>
-          </a:p>
-        </p:txBody>
-      </p:sp>
-      <p:pic>
-        <p:nvPicPr>
-          <p:cNvPr id="7" name="Image 0" descr="/home/claude/benjaminbring-cloud/sabio-deck-builders-/assets/sabio-logo-white-sm.png">    </p:cNvPr>
-          <p:cNvPicPr>
-            <a:picLocks noChangeAspect="1"/>
-          </p:cNvPicPr>
-          <p:nvPr/>
-        </p:nvPicPr>
-        <p:blipFill>
-          <a:blip r:embed="rId1"/>
-          <a:stretch>
-            <a:fillRect/>
-          </a:stretch>
-        </p:blipFill>
-        <p:spPr>
-          <a:xfrm>
-            <a:off x="8028432" y="4805172"/>
-            <a:ext cx="647572" cy="155448"/>
-          </a:xfrm>
-          <a:prstGeom prst="rect">
-            <a:avLst/>
-          </a:prstGeom>
-        </p:spPr>
-      </p:pic>
-      <p:sp>
-        <p:nvSpPr>
-          <p:cNvPr id="8" name="Shape 5"/>
+          <p:cNvPr id="5" name="Shape 3"/>
           <p:cNvSpPr/>
           <p:nvPr/>
         </p:nvSpPr>
@@ -7699,7 +7503,7 @@
       </p:sp>
       <p:graphicFrame>
         <p:nvGraphicFramePr>
-          <p:cNvPr id="9" name="Chart 0" descr=""/>
+          <p:cNvPr id="6" name="Chart 0" descr=""/>
           <p:cNvGraphicFramePr/>
           <p:nvPr/>
         </p:nvGraphicFramePr>
@@ -7709,13 +7513,13 @@
         </p:xfrm>
         <a:graphic xmlns:a="http://schemas.openxmlformats.org/drawingml/2006/main">
           <a:graphicData uri="http://schemas.openxmlformats.org/drawingml/2006/chart">
-            <c:chart xmlns:c="http://schemas.openxmlformats.org/drawingml/2006/chart" r:id="rId2"/>
+            <c:chart xmlns:c="http://schemas.openxmlformats.org/drawingml/2006/chart" r:id="rId1"/>
           </a:graphicData>
         </a:graphic>
       </p:graphicFrame>
       <p:sp>
         <p:nvSpPr>
-          <p:cNvPr id="10" name="Text 6"/>
+          <p:cNvPr id="7" name="Text 4"/>
           <p:cNvSpPr txBox="1"/>
           <p:nvPr/>
         </p:nvSpPr>
@@ -7754,7 +7558,7 @@
       </p:sp>
       <p:sp>
         <p:nvSpPr>
-          <p:cNvPr id="11" name="Text 7"/>
+          <p:cNvPr id="8" name="Text 5"/>
           <p:cNvSpPr txBox="1"/>
           <p:nvPr/>
         </p:nvSpPr>
@@ -7793,7 +7597,7 @@
       </p:sp>
       <p:sp>
         <p:nvSpPr>
-          <p:cNvPr id="12" name="Text 8"/>
+          <p:cNvPr id="9" name="Text 6"/>
           <p:cNvSpPr txBox="1"/>
           <p:nvPr/>
         </p:nvSpPr>
@@ -7850,6 +7654,54 @@
               <a:t>VYVGART adds about 2MM precise homes. EPSOLAY adds the scale.</a:t>
             </a:r>
             <a:endParaRPr lang="en-US" sz="900" dirty="0"/>
+          </a:p>
+        </p:txBody>
+      </p:sp>
+      <p:sp>
+        <p:nvSpPr>
+          <p:cNvPr id="25" name="Slide Number Placeholder 0"/>
+          <p:cNvSpPr>
+            <a:spLocks noGrp="1"/>
+          </p:cNvSpPr>
+          <p:nvPr>
+            <p:ph type="sldNum" sz="quarter" idx="4294967295"/>
+          </p:nvPr>
+        </p:nvSpPr>
+        <p:spPr>
+          <a:xfrm>
+            <a:off x="457200" y="4832604"/>
+            <a:ext cx="365760" cy="182880"/>
+          </a:xfrm>
+          <a:prstGeom prst="rect">
+            <a:avLst/>
+          </a:prstGeom>
+          <a:extLst>
+            <a:ext uri="{C572A759-6A51-4108-AA02-DFA0A04FC94B}">
+              <ma14:wrappingTextBoxFlag xmlns:ma14="http://schemas.microsoft.com/office/mac/drawingml/2011/main" val="0"/>
+            </a:ext>
+          </a:extLst>
+        </p:spPr>
+        <p:txBody>
+          <a:bodyPr lIns="0" tIns="0" rIns="0" bIns="0"/>
+          <a:lstStyle>
+            <a:lvl1pPr>
+              <a:defRPr sz="800">
+                <a:solidFill>
+                  <a:srgbClr val="7E7E7E"/>
+                </a:solidFill>
+                <a:latin typeface="Poppins SemiBold"/>
+                <a:ea typeface="Poppins SemiBold"/>
+                <a:cs typeface="Poppins SemiBold"/>
+              </a:defRPr>
+            </a:lvl1pPr>
+          </a:lstStyle>
+          <a:p>
+            <a:pPr algn="l"/>
+            <a:fld id="{F7021451-1387-4CA6-816F-3879F97B5CBC}" type="slidenum">
+              <a:rPr b="0" lang="en-US"/>
+              <a:t>6</a:t>
+            </a:fld>
+            <a:endParaRPr lang="en-US"/>
           </a:p>
         </p:txBody>
       </p:sp>
@@ -7864,13 +7716,6 @@
 <file path=ppt/slides/slide7.xml><?xml version="1.0" encoding="utf-8"?>
 <p:sld xmlns:a="http://schemas.openxmlformats.org/drawingml/2006/main" xmlns:r="http://schemas.openxmlformats.org/officeDocument/2006/relationships" xmlns:p="http://schemas.openxmlformats.org/presentationml/2006/main">
   <p:cSld name="Slide 7">
-    <p:bg>
-      <p:bgPr>
-        <a:solidFill>
-          <a:srgbClr val="1A1A1A"/>
-        </a:solidFill>
-      </p:bgPr>
-    </p:bg>
     <p:spTree>
       <p:nvGrpSpPr>
         <p:cNvPr id="1" name=""/>
@@ -8004,109 +7849,7 @@
       </p:sp>
       <p:sp>
         <p:nvSpPr>
-          <p:cNvPr id="5" name="Text 3"/>
-          <p:cNvSpPr txBox="1"/>
-          <p:nvPr/>
-        </p:nvSpPr>
-        <p:spPr>
-          <a:xfrm>
-            <a:off x="457200" y="4832604"/>
-            <a:ext cx="365760" cy="182880"/>
-          </a:xfrm>
-          <a:prstGeom prst="rect">
-            <a:avLst/>
-          </a:prstGeom>
-          <a:noFill/>
-          <a:ln/>
-        </p:spPr>
-        <p:txBody>
-          <a:bodyPr wrap="square" lIns="0" tIns="0" rIns="0" bIns="0" rtlCol="0" anchor="t"/>
-          <a:lstStyle/>
-          <a:p>
-            <a:pPr indent="0" marL="0">
-              <a:buNone/>
-            </a:pPr>
-            <a:r>
-              <a:rPr lang="en-US" sz="800" dirty="0">
-                <a:solidFill>
-                  <a:srgbClr val="7E7E7E"/>
-                </a:solidFill>
-                <a:latin typeface="Poppins SemiBold" pitchFamily="34" charset="0"/>
-                <a:ea typeface="Poppins SemiBold" pitchFamily="34" charset="-122"/>
-                <a:cs typeface="Poppins SemiBold" pitchFamily="34" charset="-120"/>
-              </a:rPr>
-              <a:t>7</a:t>
-            </a:r>
-            <a:endParaRPr lang="en-US" sz="800" dirty="0"/>
-          </a:p>
-        </p:txBody>
-      </p:sp>
-      <p:sp>
-        <p:nvSpPr>
-          <p:cNvPr id="6" name="Text 4"/>
-          <p:cNvSpPr txBox="1"/>
-          <p:nvPr/>
-        </p:nvSpPr>
-        <p:spPr>
-          <a:xfrm>
-            <a:off x="868680" y="4832604"/>
-            <a:ext cx="5486400" cy="182880"/>
-          </a:xfrm>
-          <a:prstGeom prst="rect">
-            <a:avLst/>
-          </a:prstGeom>
-          <a:noFill/>
-          <a:ln/>
-        </p:spPr>
-        <p:txBody>
-          <a:bodyPr wrap="square" lIns="0" tIns="0" rIns="0" bIns="0" rtlCol="0" anchor="t"/>
-          <a:lstStyle/>
-          <a:p>
-            <a:pPr indent="0" marL="0">
-              <a:buNone/>
-            </a:pPr>
-            <a:r>
-              <a:rPr lang="en-US" sz="700" dirty="0">
-                <a:solidFill>
-                  <a:srgbClr val="7E7E7E"/>
-                </a:solidFill>
-                <a:latin typeface="Poppins" pitchFamily="34" charset="0"/>
-                <a:ea typeface="Poppins" pitchFamily="34" charset="-122"/>
-                <a:cs typeface="Poppins" pitchFamily="34" charset="-120"/>
-              </a:rPr>
-              <a:t>Sabio × minds + assembly  ·  VYVGART and EPSOLAY, the short version  ·  Confidential</a:t>
-            </a:r>
-            <a:endParaRPr lang="en-US" sz="700" dirty="0"/>
-          </a:p>
-        </p:txBody>
-      </p:sp>
-      <p:pic>
-        <p:nvPicPr>
-          <p:cNvPr id="7" name="Image 0" descr="/home/claude/benjaminbring-cloud/sabio-deck-builders-/assets/sabio-logo-white-sm.png">    </p:cNvPr>
-          <p:cNvPicPr>
-            <a:picLocks noChangeAspect="1"/>
-          </p:cNvPicPr>
-          <p:nvPr/>
-        </p:nvPicPr>
-        <p:blipFill>
-          <a:blip r:embed="rId1"/>
-          <a:stretch>
-            <a:fillRect/>
-          </a:stretch>
-        </p:blipFill>
-        <p:spPr>
-          <a:xfrm>
-            <a:off x="8028432" y="4805172"/>
-            <a:ext cx="647572" cy="155448"/>
-          </a:xfrm>
-          <a:prstGeom prst="rect">
-            <a:avLst/>
-          </a:prstGeom>
-        </p:spPr>
-      </p:pic>
-      <p:sp>
-        <p:nvSpPr>
-          <p:cNvPr id="8" name="Shape 5"/>
+          <p:cNvPr id="5" name="Shape 3"/>
           <p:cNvSpPr/>
           <p:nvPr/>
         </p:nvSpPr>
@@ -8131,7 +7874,7 @@
       </p:sp>
       <p:sp>
         <p:nvSpPr>
-          <p:cNvPr id="9" name="Text 6"/>
+          <p:cNvPr id="6" name="Text 4"/>
           <p:cNvSpPr txBox="1"/>
           <p:nvPr/>
         </p:nvSpPr>
@@ -8170,7 +7913,7 @@
       </p:sp>
       <p:sp>
         <p:nvSpPr>
-          <p:cNvPr id="10" name="Text 7"/>
+          <p:cNvPr id="7" name="Text 5"/>
           <p:cNvSpPr txBox="1"/>
           <p:nvPr/>
         </p:nvSpPr>
@@ -8209,7 +7952,7 @@
       </p:sp>
       <p:sp>
         <p:nvSpPr>
-          <p:cNvPr id="11" name="Shape 8"/>
+          <p:cNvPr id="8" name="Shape 6"/>
           <p:cNvSpPr/>
           <p:nvPr/>
         </p:nvSpPr>
@@ -8234,7 +7977,7 @@
       </p:sp>
       <p:sp>
         <p:nvSpPr>
-          <p:cNvPr id="12" name="Text 9"/>
+          <p:cNvPr id="9" name="Text 7"/>
           <p:cNvSpPr txBox="1"/>
           <p:nvPr/>
         </p:nvSpPr>
@@ -8273,7 +8016,7 @@
       </p:sp>
       <p:sp>
         <p:nvSpPr>
-          <p:cNvPr id="13" name="Text 10"/>
+          <p:cNvPr id="10" name="Text 8"/>
           <p:cNvSpPr txBox="1"/>
           <p:nvPr/>
         </p:nvSpPr>
@@ -8312,7 +8055,7 @@
       </p:sp>
       <p:sp>
         <p:nvSpPr>
-          <p:cNvPr id="14" name="Shape 11"/>
+          <p:cNvPr id="11" name="Shape 9"/>
           <p:cNvSpPr/>
           <p:nvPr/>
         </p:nvSpPr>
@@ -8337,7 +8080,7 @@
       </p:sp>
       <p:sp>
         <p:nvSpPr>
-          <p:cNvPr id="15" name="Text 12"/>
+          <p:cNvPr id="12" name="Text 10"/>
           <p:cNvSpPr txBox="1"/>
           <p:nvPr/>
         </p:nvSpPr>
@@ -8376,7 +8119,7 @@
       </p:sp>
       <p:sp>
         <p:nvSpPr>
-          <p:cNvPr id="16" name="Text 13"/>
+          <p:cNvPr id="13" name="Text 11"/>
           <p:cNvSpPr txBox="1"/>
           <p:nvPr/>
         </p:nvSpPr>
@@ -8415,7 +8158,7 @@
       </p:sp>
       <p:sp>
         <p:nvSpPr>
-          <p:cNvPr id="17" name="Shape 14"/>
+          <p:cNvPr id="14" name="Shape 12"/>
           <p:cNvSpPr/>
           <p:nvPr/>
         </p:nvSpPr>
@@ -8440,7 +8183,7 @@
       </p:sp>
       <p:sp>
         <p:nvSpPr>
-          <p:cNvPr id="18" name="Text 15"/>
+          <p:cNvPr id="15" name="Text 13"/>
           <p:cNvSpPr txBox="1"/>
           <p:nvPr/>
         </p:nvSpPr>
@@ -8479,7 +8222,7 @@
       </p:sp>
       <p:sp>
         <p:nvSpPr>
-          <p:cNvPr id="19" name="Text 16"/>
+          <p:cNvPr id="16" name="Text 14"/>
           <p:cNvSpPr txBox="1"/>
           <p:nvPr/>
         </p:nvSpPr>
@@ -8518,7 +8261,7 @@
       </p:sp>
       <p:sp>
         <p:nvSpPr>
-          <p:cNvPr id="20" name="Shape 17"/>
+          <p:cNvPr id="17" name="Shape 15"/>
           <p:cNvSpPr/>
           <p:nvPr/>
         </p:nvSpPr>
@@ -8543,7 +8286,7 @@
       </p:sp>
       <p:sp>
         <p:nvSpPr>
-          <p:cNvPr id="21" name="Text 18"/>
+          <p:cNvPr id="18" name="Text 16"/>
           <p:cNvSpPr txBox="1"/>
           <p:nvPr/>
         </p:nvSpPr>
@@ -8582,7 +8325,7 @@
       </p:sp>
       <p:sp>
         <p:nvSpPr>
-          <p:cNvPr id="22" name="Text 19"/>
+          <p:cNvPr id="19" name="Text 17"/>
           <p:cNvSpPr txBox="1"/>
           <p:nvPr/>
         </p:nvSpPr>
@@ -8704,6 +8447,54 @@
               <a:t>Separate delivery reports for argenx and Galderma</a:t>
             </a:r>
             <a:endParaRPr lang="en-US" sz="950" dirty="0"/>
+          </a:p>
+        </p:txBody>
+      </p:sp>
+      <p:sp>
+        <p:nvSpPr>
+          <p:cNvPr id="25" name="Slide Number Placeholder 0"/>
+          <p:cNvSpPr>
+            <a:spLocks noGrp="1"/>
+          </p:cNvSpPr>
+          <p:nvPr>
+            <p:ph type="sldNum" sz="quarter" idx="4294967295"/>
+          </p:nvPr>
+        </p:nvSpPr>
+        <p:spPr>
+          <a:xfrm>
+            <a:off x="457200" y="4832604"/>
+            <a:ext cx="365760" cy="182880"/>
+          </a:xfrm>
+          <a:prstGeom prst="rect">
+            <a:avLst/>
+          </a:prstGeom>
+          <a:extLst>
+            <a:ext uri="{C572A759-6A51-4108-AA02-DFA0A04FC94B}">
+              <ma14:wrappingTextBoxFlag xmlns:ma14="http://schemas.microsoft.com/office/mac/drawingml/2011/main" val="0"/>
+            </a:ext>
+          </a:extLst>
+        </p:spPr>
+        <p:txBody>
+          <a:bodyPr lIns="0" tIns="0" rIns="0" bIns="0"/>
+          <a:lstStyle>
+            <a:lvl1pPr>
+              <a:defRPr sz="800">
+                <a:solidFill>
+                  <a:srgbClr val="7E7E7E"/>
+                </a:solidFill>
+                <a:latin typeface="Poppins SemiBold"/>
+                <a:ea typeface="Poppins SemiBold"/>
+                <a:cs typeface="Poppins SemiBold"/>
+              </a:defRPr>
+            </a:lvl1pPr>
+          </a:lstStyle>
+          <a:p>
+            <a:pPr algn="l"/>
+            <a:fld id="{F7021451-1387-4CA6-816F-3879F97B5CBC}" type="slidenum">
+              <a:rPr b="0" lang="en-US"/>
+              <a:t>7</a:t>
+            </a:fld>
+            <a:endParaRPr lang="en-US"/>
           </a:p>
         </p:txBody>
       </p:sp>
@@ -8718,13 +8509,6 @@
 <file path=ppt/slides/slide8.xml><?xml version="1.0" encoding="utf-8"?>
 <p:sld xmlns:a="http://schemas.openxmlformats.org/drawingml/2006/main" xmlns:r="http://schemas.openxmlformats.org/officeDocument/2006/relationships" xmlns:p="http://schemas.openxmlformats.org/presentationml/2006/main">
   <p:cSld name="Slide 8">
-    <p:bg>
-      <p:bgPr>
-        <a:solidFill>
-          <a:srgbClr val="1A1A1A"/>
-        </a:solidFill>
-      </p:bgPr>
-    </p:bg>
     <p:spTree>
       <p:nvGrpSpPr>
         <p:cNvPr id="1" name=""/>
@@ -8858,109 +8642,7 @@
       </p:sp>
       <p:sp>
         <p:nvSpPr>
-          <p:cNvPr id="5" name="Text 3"/>
-          <p:cNvSpPr txBox="1"/>
-          <p:nvPr/>
-        </p:nvSpPr>
-        <p:spPr>
-          <a:xfrm>
-            <a:off x="457200" y="4832604"/>
-            <a:ext cx="365760" cy="182880"/>
-          </a:xfrm>
-          <a:prstGeom prst="rect">
-            <a:avLst/>
-          </a:prstGeom>
-          <a:noFill/>
-          <a:ln/>
-        </p:spPr>
-        <p:txBody>
-          <a:bodyPr wrap="square" lIns="0" tIns="0" rIns="0" bIns="0" rtlCol="0" anchor="t"/>
-          <a:lstStyle/>
-          <a:p>
-            <a:pPr indent="0" marL="0">
-              <a:buNone/>
-            </a:pPr>
-            <a:r>
-              <a:rPr lang="en-US" sz="800" dirty="0">
-                <a:solidFill>
-                  <a:srgbClr val="7E7E7E"/>
-                </a:solidFill>
-                <a:latin typeface="Poppins SemiBold" pitchFamily="34" charset="0"/>
-                <a:ea typeface="Poppins SemiBold" pitchFamily="34" charset="-122"/>
-                <a:cs typeface="Poppins SemiBold" pitchFamily="34" charset="-120"/>
-              </a:rPr>
-              <a:t>8</a:t>
-            </a:r>
-            <a:endParaRPr lang="en-US" sz="800" dirty="0"/>
-          </a:p>
-        </p:txBody>
-      </p:sp>
-      <p:sp>
-        <p:nvSpPr>
-          <p:cNvPr id="6" name="Text 4"/>
-          <p:cNvSpPr txBox="1"/>
-          <p:nvPr/>
-        </p:nvSpPr>
-        <p:spPr>
-          <a:xfrm>
-            <a:off x="868680" y="4832604"/>
-            <a:ext cx="5486400" cy="182880"/>
-          </a:xfrm>
-          <a:prstGeom prst="rect">
-            <a:avLst/>
-          </a:prstGeom>
-          <a:noFill/>
-          <a:ln/>
-        </p:spPr>
-        <p:txBody>
-          <a:bodyPr wrap="square" lIns="0" tIns="0" rIns="0" bIns="0" rtlCol="0" anchor="t"/>
-          <a:lstStyle/>
-          <a:p>
-            <a:pPr indent="0" marL="0">
-              <a:buNone/>
-            </a:pPr>
-            <a:r>
-              <a:rPr lang="en-US" sz="700" dirty="0">
-                <a:solidFill>
-                  <a:srgbClr val="7E7E7E"/>
-                </a:solidFill>
-                <a:latin typeface="Poppins" pitchFamily="34" charset="0"/>
-                <a:ea typeface="Poppins" pitchFamily="34" charset="-122"/>
-                <a:cs typeface="Poppins" pitchFamily="34" charset="-120"/>
-              </a:rPr>
-              <a:t>Sabio × minds + assembly  ·  VYVGART and EPSOLAY, the short version  ·  Confidential</a:t>
-            </a:r>
-            <a:endParaRPr lang="en-US" sz="700" dirty="0"/>
-          </a:p>
-        </p:txBody>
-      </p:sp>
-      <p:pic>
-        <p:nvPicPr>
-          <p:cNvPr id="7" name="Image 0" descr="/home/claude/benjaminbring-cloud/sabio-deck-builders-/assets/sabio-logo-white-sm.png">    </p:cNvPr>
-          <p:cNvPicPr>
-            <a:picLocks noChangeAspect="1"/>
-          </p:cNvPicPr>
-          <p:nvPr/>
-        </p:nvPicPr>
-        <p:blipFill>
-          <a:blip r:embed="rId1"/>
-          <a:stretch>
-            <a:fillRect/>
-          </a:stretch>
-        </p:blipFill>
-        <p:spPr>
-          <a:xfrm>
-            <a:off x="8028432" y="4805172"/>
-            <a:ext cx="647572" cy="155448"/>
-          </a:xfrm>
-          <a:prstGeom prst="rect">
-            <a:avLst/>
-          </a:prstGeom>
-        </p:spPr>
-      </p:pic>
-      <p:sp>
-        <p:nvSpPr>
-          <p:cNvPr id="8" name="Shape 5"/>
+          <p:cNvPr id="5" name="Shape 3"/>
           <p:cNvSpPr/>
           <p:nvPr/>
         </p:nvSpPr>
@@ -8985,7 +8667,7 @@
       </p:sp>
       <p:sp>
         <p:nvSpPr>
-          <p:cNvPr id="9" name="Text 6"/>
+          <p:cNvPr id="6" name="Text 4"/>
           <p:cNvSpPr txBox="1"/>
           <p:nvPr/>
         </p:nvSpPr>
@@ -9024,7 +8706,7 @@
       </p:sp>
       <p:sp>
         <p:nvSpPr>
-          <p:cNvPr id="10" name="Text 7"/>
+          <p:cNvPr id="7" name="Text 5"/>
           <p:cNvSpPr txBox="1"/>
           <p:nvPr/>
         </p:nvSpPr>
@@ -9063,7 +8745,7 @@
       </p:sp>
       <p:sp>
         <p:nvSpPr>
-          <p:cNvPr id="11" name="Shape 8"/>
+          <p:cNvPr id="8" name="Shape 6"/>
           <p:cNvSpPr/>
           <p:nvPr/>
         </p:nvSpPr>
@@ -9088,7 +8770,7 @@
       </p:sp>
       <p:sp>
         <p:nvSpPr>
-          <p:cNvPr id="12" name="Text 9"/>
+          <p:cNvPr id="9" name="Text 7"/>
           <p:cNvSpPr txBox="1"/>
           <p:nvPr/>
         </p:nvSpPr>
@@ -9127,7 +8809,7 @@
       </p:sp>
       <p:sp>
         <p:nvSpPr>
-          <p:cNvPr id="13" name="Text 10"/>
+          <p:cNvPr id="10" name="Text 8"/>
           <p:cNvSpPr txBox="1"/>
           <p:nvPr/>
         </p:nvSpPr>
@@ -9166,7 +8848,7 @@
       </p:sp>
       <p:sp>
         <p:nvSpPr>
-          <p:cNvPr id="14" name="Shape 11"/>
+          <p:cNvPr id="11" name="Shape 9"/>
           <p:cNvSpPr/>
           <p:nvPr/>
         </p:nvSpPr>
@@ -9191,7 +8873,7 @@
       </p:sp>
       <p:sp>
         <p:nvSpPr>
-          <p:cNvPr id="15" name="Text 12"/>
+          <p:cNvPr id="12" name="Text 10"/>
           <p:cNvSpPr txBox="1"/>
           <p:nvPr/>
         </p:nvSpPr>
@@ -9230,7 +8912,7 @@
       </p:sp>
       <p:sp>
         <p:nvSpPr>
-          <p:cNvPr id="16" name="Text 13"/>
+          <p:cNvPr id="13" name="Text 11"/>
           <p:cNvSpPr txBox="1"/>
           <p:nvPr/>
         </p:nvSpPr>
@@ -9269,7 +8951,7 @@
       </p:sp>
       <p:sp>
         <p:nvSpPr>
-          <p:cNvPr id="17" name="Shape 14"/>
+          <p:cNvPr id="14" name="Shape 12"/>
           <p:cNvSpPr/>
           <p:nvPr/>
         </p:nvSpPr>
@@ -9294,7 +8976,7 @@
       </p:sp>
       <p:sp>
         <p:nvSpPr>
-          <p:cNvPr id="18" name="Text 15"/>
+          <p:cNvPr id="15" name="Text 13"/>
           <p:cNvSpPr txBox="1"/>
           <p:nvPr/>
         </p:nvSpPr>
@@ -9333,7 +9015,7 @@
       </p:sp>
       <p:sp>
         <p:nvSpPr>
-          <p:cNvPr id="19" name="Text 16"/>
+          <p:cNvPr id="16" name="Text 14"/>
           <p:cNvSpPr txBox="1"/>
           <p:nvPr/>
         </p:nvSpPr>
@@ -9372,7 +9054,7 @@
       </p:sp>
       <p:sp>
         <p:nvSpPr>
-          <p:cNvPr id="20" name="Shape 17"/>
+          <p:cNvPr id="17" name="Shape 15"/>
           <p:cNvSpPr/>
           <p:nvPr/>
         </p:nvSpPr>
@@ -9397,7 +9079,7 @@
       </p:sp>
       <p:sp>
         <p:nvSpPr>
-          <p:cNvPr id="21" name="Text 18"/>
+          <p:cNvPr id="18" name="Text 16"/>
           <p:cNvSpPr txBox="1"/>
           <p:nvPr/>
         </p:nvSpPr>
@@ -9436,7 +9118,7 @@
       </p:sp>
       <p:sp>
         <p:nvSpPr>
-          <p:cNvPr id="22" name="Text 19"/>
+          <p:cNvPr id="19" name="Text 17"/>
           <p:cNvSpPr txBox="1"/>
           <p:nvPr/>
         </p:nvSpPr>
@@ -9475,7 +9157,7 @@
       </p:sp>
       <p:sp>
         <p:nvSpPr>
-          <p:cNvPr id="23" name="Shape 20"/>
+          <p:cNvPr id="20" name="Shape 18"/>
           <p:cNvSpPr/>
           <p:nvPr/>
         </p:nvSpPr>
@@ -9500,7 +9182,7 @@
       </p:sp>
       <p:sp>
         <p:nvSpPr>
-          <p:cNvPr id="24" name="Text 21"/>
+          <p:cNvPr id="21" name="Text 19"/>
           <p:cNvSpPr txBox="1"/>
           <p:nvPr/>
         </p:nvSpPr>
@@ -9539,7 +9221,7 @@
       </p:sp>
       <p:sp>
         <p:nvSpPr>
-          <p:cNvPr id="25" name="Text 22"/>
+          <p:cNvPr id="22" name="Text 20"/>
           <p:cNvSpPr txBox="1"/>
           <p:nvPr/>
         </p:nvSpPr>
@@ -9573,6 +9255,54 @@
               <a:t>No raw device IDs. Reporting is aggregated by audience and kept separate for each client.</a:t>
             </a:r>
             <a:endParaRPr lang="en-US" sz="850" dirty="0"/>
+          </a:p>
+        </p:txBody>
+      </p:sp>
+      <p:sp>
+        <p:nvSpPr>
+          <p:cNvPr id="25" name="Slide Number Placeholder 0"/>
+          <p:cNvSpPr>
+            <a:spLocks noGrp="1"/>
+          </p:cNvSpPr>
+          <p:nvPr>
+            <p:ph type="sldNum" sz="quarter" idx="4294967295"/>
+          </p:nvPr>
+        </p:nvSpPr>
+        <p:spPr>
+          <a:xfrm>
+            <a:off x="457200" y="4832604"/>
+            <a:ext cx="365760" cy="182880"/>
+          </a:xfrm>
+          <a:prstGeom prst="rect">
+            <a:avLst/>
+          </a:prstGeom>
+          <a:extLst>
+            <a:ext uri="{C572A759-6A51-4108-AA02-DFA0A04FC94B}">
+              <ma14:wrappingTextBoxFlag xmlns:ma14="http://schemas.microsoft.com/office/mac/drawingml/2011/main" val="0"/>
+            </a:ext>
+          </a:extLst>
+        </p:spPr>
+        <p:txBody>
+          <a:bodyPr lIns="0" tIns="0" rIns="0" bIns="0"/>
+          <a:lstStyle>
+            <a:lvl1pPr>
+              <a:defRPr sz="800">
+                <a:solidFill>
+                  <a:srgbClr val="7E7E7E"/>
+                </a:solidFill>
+                <a:latin typeface="Poppins SemiBold"/>
+                <a:ea typeface="Poppins SemiBold"/>
+                <a:cs typeface="Poppins SemiBold"/>
+              </a:defRPr>
+            </a:lvl1pPr>
+          </a:lstStyle>
+          <a:p>
+            <a:pPr algn="l"/>
+            <a:fld id="{F7021451-1387-4CA6-816F-3879F97B5CBC}" type="slidenum">
+              <a:rPr b="0" lang="en-US"/>
+              <a:t>8</a:t>
+            </a:fld>
+            <a:endParaRPr lang="en-US"/>
           </a:p>
         </p:txBody>
       </p:sp>
@@ -9587,13 +9317,6 @@
 <file path=ppt/slides/slide9.xml><?xml version="1.0" encoding="utf-8"?>
 <p:sld xmlns:a="http://schemas.openxmlformats.org/drawingml/2006/main" xmlns:r="http://schemas.openxmlformats.org/officeDocument/2006/relationships" xmlns:p="http://schemas.openxmlformats.org/presentationml/2006/main">
   <p:cSld name="Slide 9">
-    <p:bg>
-      <p:bgPr>
-        <a:solidFill>
-          <a:srgbClr val="1A1A1A"/>
-        </a:solidFill>
-      </p:bgPr>
-    </p:bg>
     <p:spTree>
       <p:nvGrpSpPr>
         <p:cNvPr id="1" name=""/>
@@ -9688,109 +9411,7 @@
       </p:sp>
       <p:sp>
         <p:nvSpPr>
-          <p:cNvPr id="4" name="Text 2"/>
-          <p:cNvSpPr txBox="1"/>
-          <p:nvPr/>
-        </p:nvSpPr>
-        <p:spPr>
-          <a:xfrm>
-            <a:off x="457200" y="4832604"/>
-            <a:ext cx="365760" cy="182880"/>
-          </a:xfrm>
-          <a:prstGeom prst="rect">
-            <a:avLst/>
-          </a:prstGeom>
-          <a:noFill/>
-          <a:ln/>
-        </p:spPr>
-        <p:txBody>
-          <a:bodyPr wrap="square" lIns="0" tIns="0" rIns="0" bIns="0" rtlCol="0" anchor="t"/>
-          <a:lstStyle/>
-          <a:p>
-            <a:pPr indent="0" marL="0">
-              <a:buNone/>
-            </a:pPr>
-            <a:r>
-              <a:rPr lang="en-US" sz="800" dirty="0">
-                <a:solidFill>
-                  <a:srgbClr val="7E7E7E"/>
-                </a:solidFill>
-                <a:latin typeface="Poppins SemiBold" pitchFamily="34" charset="0"/>
-                <a:ea typeface="Poppins SemiBold" pitchFamily="34" charset="-122"/>
-                <a:cs typeface="Poppins SemiBold" pitchFamily="34" charset="-120"/>
-              </a:rPr>
-              <a:t>9</a:t>
-            </a:r>
-            <a:endParaRPr lang="en-US" sz="800" dirty="0"/>
-          </a:p>
-        </p:txBody>
-      </p:sp>
-      <p:sp>
-        <p:nvSpPr>
-          <p:cNvPr id="5" name="Text 3"/>
-          <p:cNvSpPr txBox="1"/>
-          <p:nvPr/>
-        </p:nvSpPr>
-        <p:spPr>
-          <a:xfrm>
-            <a:off x="868680" y="4832604"/>
-            <a:ext cx="5486400" cy="182880"/>
-          </a:xfrm>
-          <a:prstGeom prst="rect">
-            <a:avLst/>
-          </a:prstGeom>
-          <a:noFill/>
-          <a:ln/>
-        </p:spPr>
-        <p:txBody>
-          <a:bodyPr wrap="square" lIns="0" tIns="0" rIns="0" bIns="0" rtlCol="0" anchor="t"/>
-          <a:lstStyle/>
-          <a:p>
-            <a:pPr indent="0" marL="0">
-              <a:buNone/>
-            </a:pPr>
-            <a:r>
-              <a:rPr lang="en-US" sz="700" dirty="0">
-                <a:solidFill>
-                  <a:srgbClr val="7E7E7E"/>
-                </a:solidFill>
-                <a:latin typeface="Poppins" pitchFamily="34" charset="0"/>
-                <a:ea typeface="Poppins" pitchFamily="34" charset="-122"/>
-                <a:cs typeface="Poppins" pitchFamily="34" charset="-120"/>
-              </a:rPr>
-              <a:t>Sabio × minds + assembly  ·  VYVGART and EPSOLAY, the short version  ·  Confidential</a:t>
-            </a:r>
-            <a:endParaRPr lang="en-US" sz="700" dirty="0"/>
-          </a:p>
-        </p:txBody>
-      </p:sp>
-      <p:pic>
-        <p:nvPicPr>
-          <p:cNvPr id="6" name="Image 0" descr="/home/claude/benjaminbring-cloud/sabio-deck-builders-/assets/sabio-logo-white-sm.png">    </p:cNvPr>
-          <p:cNvPicPr>
-            <a:picLocks noChangeAspect="1"/>
-          </p:cNvPicPr>
-          <p:nvPr/>
-        </p:nvPicPr>
-        <p:blipFill>
-          <a:blip r:embed="rId1"/>
-          <a:stretch>
-            <a:fillRect/>
-          </a:stretch>
-        </p:blipFill>
-        <p:spPr>
-          <a:xfrm>
-            <a:off x="8028432" y="4805172"/>
-            <a:ext cx="647572" cy="155448"/>
-          </a:xfrm>
-          <a:prstGeom prst="rect">
-            <a:avLst/>
-          </a:prstGeom>
-        </p:spPr>
-      </p:pic>
-      <p:sp>
-        <p:nvSpPr>
-          <p:cNvPr id="7" name="Shape 4"/>
+          <p:cNvPr id="4" name="Shape 2"/>
           <p:cNvSpPr/>
           <p:nvPr/>
         </p:nvSpPr>
@@ -9815,7 +9436,7 @@
       </p:sp>
       <p:sp>
         <p:nvSpPr>
-          <p:cNvPr id="8" name="Text 5"/>
+          <p:cNvPr id="5" name="Text 3"/>
           <p:cNvSpPr txBox="1"/>
           <p:nvPr/>
         </p:nvSpPr>
@@ -9854,7 +9475,7 @@
       </p:sp>
       <p:sp>
         <p:nvSpPr>
-          <p:cNvPr id="9" name="Text 6"/>
+          <p:cNvPr id="6" name="Text 4"/>
           <p:cNvSpPr txBox="1"/>
           <p:nvPr/>
         </p:nvSpPr>
@@ -9893,7 +9514,7 @@
       </p:sp>
       <p:sp>
         <p:nvSpPr>
-          <p:cNvPr id="10" name="Text 7"/>
+          <p:cNvPr id="7" name="Text 5"/>
           <p:cNvSpPr txBox="1"/>
           <p:nvPr/>
         </p:nvSpPr>
@@ -9932,7 +9553,7 @@
       </p:sp>
       <p:sp>
         <p:nvSpPr>
-          <p:cNvPr id="11" name="Shape 8"/>
+          <p:cNvPr id="8" name="Shape 6"/>
           <p:cNvSpPr/>
           <p:nvPr/>
         </p:nvSpPr>
@@ -9957,7 +9578,7 @@
       </p:sp>
       <p:sp>
         <p:nvSpPr>
-          <p:cNvPr id="12" name="Text 9"/>
+          <p:cNvPr id="9" name="Text 7"/>
           <p:cNvSpPr txBox="1"/>
           <p:nvPr/>
         </p:nvSpPr>
@@ -9996,7 +9617,7 @@
       </p:sp>
       <p:sp>
         <p:nvSpPr>
-          <p:cNvPr id="13" name="Shape 10"/>
+          <p:cNvPr id="10" name="Shape 8"/>
           <p:cNvSpPr/>
           <p:nvPr/>
         </p:nvSpPr>
@@ -10021,7 +9642,7 @@
       </p:sp>
       <p:sp>
         <p:nvSpPr>
-          <p:cNvPr id="14" name="Text 11"/>
+          <p:cNvPr id="11" name="Text 9"/>
           <p:cNvSpPr txBox="1"/>
           <p:nvPr/>
         </p:nvSpPr>
@@ -10060,7 +9681,7 @@
       </p:sp>
       <p:sp>
         <p:nvSpPr>
-          <p:cNvPr id="15" name="Text 12"/>
+          <p:cNvPr id="12" name="Text 10"/>
           <p:cNvSpPr txBox="1"/>
           <p:nvPr/>
         </p:nvSpPr>
@@ -10099,7 +9720,7 @@
       </p:sp>
       <p:sp>
         <p:nvSpPr>
-          <p:cNvPr id="16" name="Text 13"/>
+          <p:cNvPr id="13" name="Text 11"/>
           <p:cNvSpPr txBox="1"/>
           <p:nvPr/>
         </p:nvSpPr>
@@ -10138,7 +9759,7 @@
       </p:sp>
       <p:sp>
         <p:nvSpPr>
-          <p:cNvPr id="17" name="Shape 14"/>
+          <p:cNvPr id="14" name="Shape 12"/>
           <p:cNvSpPr/>
           <p:nvPr/>
         </p:nvSpPr>
@@ -10163,7 +9784,7 @@
       </p:sp>
       <p:sp>
         <p:nvSpPr>
-          <p:cNvPr id="18" name="Text 15"/>
+          <p:cNvPr id="15" name="Text 13"/>
           <p:cNvSpPr txBox="1"/>
           <p:nvPr/>
         </p:nvSpPr>
@@ -10202,7 +9823,7 @@
       </p:sp>
       <p:sp>
         <p:nvSpPr>
-          <p:cNvPr id="19" name="Shape 16"/>
+          <p:cNvPr id="16" name="Shape 14"/>
           <p:cNvSpPr/>
           <p:nvPr/>
         </p:nvSpPr>
@@ -10227,7 +9848,7 @@
       </p:sp>
       <p:sp>
         <p:nvSpPr>
-          <p:cNvPr id="20" name="Text 17"/>
+          <p:cNvPr id="17" name="Text 15"/>
           <p:cNvSpPr txBox="1"/>
           <p:nvPr/>
         </p:nvSpPr>
@@ -10266,7 +9887,7 @@
       </p:sp>
       <p:sp>
         <p:nvSpPr>
-          <p:cNvPr id="21" name="Text 18"/>
+          <p:cNvPr id="18" name="Text 16"/>
           <p:cNvSpPr txBox="1"/>
           <p:nvPr/>
         </p:nvSpPr>
@@ -10305,7 +9926,7 @@
       </p:sp>
       <p:sp>
         <p:nvSpPr>
-          <p:cNvPr id="22" name="Text 19"/>
+          <p:cNvPr id="19" name="Text 17"/>
           <p:cNvSpPr txBox="1"/>
           <p:nvPr/>
         </p:nvSpPr>
@@ -10344,7 +9965,7 @@
       </p:sp>
       <p:sp>
         <p:nvSpPr>
-          <p:cNvPr id="23" name="Shape 20"/>
+          <p:cNvPr id="20" name="Shape 18"/>
           <p:cNvSpPr/>
           <p:nvPr/>
         </p:nvSpPr>
@@ -10369,7 +9990,7 @@
       </p:sp>
       <p:sp>
         <p:nvSpPr>
-          <p:cNvPr id="24" name="Text 21"/>
+          <p:cNvPr id="21" name="Text 19"/>
           <p:cNvSpPr txBox="1"/>
           <p:nvPr/>
         </p:nvSpPr>
@@ -10408,7 +10029,7 @@
       </p:sp>
       <p:sp>
         <p:nvSpPr>
-          <p:cNvPr id="25" name="Text 22"/>
+          <p:cNvPr id="22" name="Text 20"/>
           <p:cNvSpPr txBox="1"/>
           <p:nvPr/>
         </p:nvSpPr>
@@ -10442,6 +10063,54 @@
               <a:t>Happy to keep trimming. If one brand is the better first conversation with your clients, we'll lead with that one.</a:t>
             </a:r>
             <a:endParaRPr lang="en-US" sz="950" dirty="0"/>
+          </a:p>
+        </p:txBody>
+      </p:sp>
+      <p:sp>
+        <p:nvSpPr>
+          <p:cNvPr id="25" name="Slide Number Placeholder 0"/>
+          <p:cNvSpPr>
+            <a:spLocks noGrp="1"/>
+          </p:cNvSpPr>
+          <p:nvPr>
+            <p:ph type="sldNum" sz="quarter" idx="4294967295"/>
+          </p:nvPr>
+        </p:nvSpPr>
+        <p:spPr>
+          <a:xfrm>
+            <a:off x="457200" y="4832604"/>
+            <a:ext cx="365760" cy="182880"/>
+          </a:xfrm>
+          <a:prstGeom prst="rect">
+            <a:avLst/>
+          </a:prstGeom>
+          <a:extLst>
+            <a:ext uri="{C572A759-6A51-4108-AA02-DFA0A04FC94B}">
+              <ma14:wrappingTextBoxFlag xmlns:ma14="http://schemas.microsoft.com/office/mac/drawingml/2011/main" val="0"/>
+            </a:ext>
+          </a:extLst>
+        </p:spPr>
+        <p:txBody>
+          <a:bodyPr lIns="0" tIns="0" rIns="0" bIns="0"/>
+          <a:lstStyle>
+            <a:lvl1pPr>
+              <a:defRPr sz="800">
+                <a:solidFill>
+                  <a:srgbClr val="7E7E7E"/>
+                </a:solidFill>
+                <a:latin typeface="Poppins SemiBold"/>
+                <a:ea typeface="Poppins SemiBold"/>
+                <a:cs typeface="Poppins SemiBold"/>
+              </a:defRPr>
+            </a:lvl1pPr>
+          </a:lstStyle>
+          <a:p>
+            <a:pPr algn="l"/>
+            <a:fld id="{F7021451-1387-4CA6-816F-3879F97B5CBC}" type="slidenum">
+              <a:rPr b="0" lang="en-US"/>
+              <a:t>9</a:t>
+            </a:fld>
+            <a:endParaRPr lang="en-US"/>
           </a:p>
         </p:txBody>
       </p:sp>
